--- a/UI_PX.pptx
+++ b/UI_PX.pptx
@@ -3719,6 +3719,53 @@
           </a:fontRef>
         </p:style>
       </p:cxnSp>
+      <p:sp>
+        <p:nvSpPr>
+          <p:cNvPr id="7" name="文字方塊 6">
+            <a:extLst>
+              <a:ext uri="{FF2B5EF4-FFF2-40B4-BE49-F238E27FC236}">
+                <a16:creationId xmlns:a16="http://schemas.microsoft.com/office/drawing/2014/main" id="{E1FAD34B-4BC8-466C-9FB1-A9C02F2EFA21}"/>
+              </a:ext>
+            </a:extLst>
+          </p:cNvPr>
+          <p:cNvSpPr txBox="1"/>
+          <p:nvPr/>
+        </p:nvSpPr>
+        <p:spPr>
+          <a:xfrm>
+            <a:off x="15904890" y="9353451"/>
+            <a:ext cx="9144000" cy="729430"/>
+          </a:xfrm>
+          <a:prstGeom prst="rect">
+            <a:avLst/>
+          </a:prstGeom>
+          <a:noFill/>
+        </p:spPr>
+        <p:txBody>
+          <a:bodyPr wrap="square">
+            <a:spAutoFit/>
+          </a:bodyPr>
+          <a:lstStyle/>
+          <a:p>
+            <a:pPr>
+              <a:lnSpc>
+                <a:spcPct val="120000"/>
+              </a:lnSpc>
+            </a:pPr>
+            <a:r>
+              <a:rPr lang="zh-TW" altLang="en-US" sz="3600" b="1" dirty="0">
+                <a:latin typeface="俐方體11號" pitchFamily="2" charset="-120"/>
+                <a:ea typeface="俐方體11號" pitchFamily="2" charset="-120"/>
+              </a:rPr>
+              <a:t>清空存檔</a:t>
+            </a:r>
+            <a:endParaRPr lang="en-US" altLang="zh-TW" sz="3600" b="1" dirty="0">
+              <a:latin typeface="俐方體11號" pitchFamily="2" charset="-120"/>
+              <a:ea typeface="俐方體11號" pitchFamily="2" charset="-120"/>
+            </a:endParaRPr>
+          </a:p>
+        </p:txBody>
+      </p:sp>
     </p:spTree>
     <p:extLst>
       <p:ext uri="{BB962C8B-B14F-4D97-AF65-F5344CB8AC3E}">
@@ -15801,6 +15848,59 @@
           </a:fontRef>
         </p:style>
       </p:cxnSp>
+      <p:sp>
+        <p:nvSpPr>
+          <p:cNvPr id="5" name="文字方塊 4">
+            <a:extLst>
+              <a:ext uri="{FF2B5EF4-FFF2-40B4-BE49-F238E27FC236}">
+                <a16:creationId xmlns:a16="http://schemas.microsoft.com/office/drawing/2014/main" id="{9E158149-E539-47DB-941D-DAB505018827}"/>
+              </a:ext>
+            </a:extLst>
+          </p:cNvPr>
+          <p:cNvSpPr txBox="1"/>
+          <p:nvPr/>
+        </p:nvSpPr>
+        <p:spPr>
+          <a:xfrm>
+            <a:off x="15904890" y="9353451"/>
+            <a:ext cx="9144000" cy="729430"/>
+          </a:xfrm>
+          <a:prstGeom prst="rect">
+            <a:avLst/>
+          </a:prstGeom>
+          <a:noFill/>
+        </p:spPr>
+        <p:txBody>
+          <a:bodyPr wrap="square">
+            <a:spAutoFit/>
+          </a:bodyPr>
+          <a:lstStyle/>
+          <a:p>
+            <a:pPr>
+              <a:lnSpc>
+                <a:spcPct val="120000"/>
+              </a:lnSpc>
+            </a:pPr>
+            <a:r>
+              <a:rPr lang="zh-TW" altLang="en-US" sz="3600" b="1" dirty="0">
+                <a:solidFill>
+                  <a:srgbClr val="FF0000"/>
+                </a:solidFill>
+                <a:latin typeface="俐方體11號" pitchFamily="2" charset="-120"/>
+                <a:ea typeface="俐方體11號" pitchFamily="2" charset="-120"/>
+              </a:rPr>
+              <a:t>清空存檔</a:t>
+            </a:r>
+            <a:endParaRPr lang="en-US" altLang="zh-TW" sz="3600" b="1" dirty="0">
+              <a:solidFill>
+                <a:srgbClr val="FF0000"/>
+              </a:solidFill>
+              <a:latin typeface="俐方體11號" pitchFamily="2" charset="-120"/>
+              <a:ea typeface="俐方體11號" pitchFamily="2" charset="-120"/>
+            </a:endParaRPr>
+          </a:p>
+        </p:txBody>
+      </p:sp>
     </p:spTree>
     <p:extLst>
       <p:ext uri="{BB962C8B-B14F-4D97-AF65-F5344CB8AC3E}">
@@ -25292,7 +25392,7 @@
                   <a:latin typeface="俐方體11號" pitchFamily="2" charset="-120"/>
                   <a:ea typeface="俐方體11號" pitchFamily="2" charset="-120"/>
                 </a:rPr>
-                <a:t>堅持</a:t>
+                <a:t>脫隊</a:t>
               </a:r>
             </a:p>
           </p:txBody>
@@ -31924,7 +32024,7 @@
                   <a:latin typeface="俐方體11號" pitchFamily="2" charset="-120"/>
                   <a:ea typeface="俐方體11號" pitchFamily="2" charset="-120"/>
                 </a:rPr>
-                <a:t>堅持</a:t>
+                <a:t>脫隊</a:t>
               </a:r>
             </a:p>
           </p:txBody>

--- a/UI_PX.pptx
+++ b/UI_PX.pptx
@@ -5,7 +5,7 @@
     <p:sldMasterId id="2147483696" r:id="rId1"/>
   </p:sldMasterIdLst>
   <p:notesMasterIdLst>
-    <p:notesMasterId r:id="rId31"/>
+    <p:notesMasterId r:id="rId33"/>
   </p:notesMasterIdLst>
   <p:sldIdLst>
     <p:sldId id="256" r:id="rId2"/>
@@ -35,8 +35,10 @@
     <p:sldId id="374" r:id="rId26"/>
     <p:sldId id="375" r:id="rId27"/>
     <p:sldId id="376" r:id="rId28"/>
-    <p:sldId id="272" r:id="rId29"/>
-    <p:sldId id="273" r:id="rId30"/>
+    <p:sldId id="378" r:id="rId29"/>
+    <p:sldId id="379" r:id="rId30"/>
+    <p:sldId id="272" r:id="rId31"/>
+    <p:sldId id="273" r:id="rId32"/>
   </p:sldIdLst>
   <p:sldSz cx="18288000" cy="10287000"/>
   <p:notesSz cx="6858000" cy="9144000"/>
@@ -183,6 +185,8 @@
             <p14:sldId id="374"/>
             <p14:sldId id="375"/>
             <p14:sldId id="376"/>
+            <p14:sldId id="378"/>
+            <p14:sldId id="379"/>
             <p14:sldId id="272"/>
             <p14:sldId id="273"/>
           </p14:sldIdLst>
@@ -278,7 +282,7 @@
           <a:p>
             <a:fld id="{05484709-82B2-4E7F-9F86-2B0FA413AB70}" type="datetimeFigureOut">
               <a:rPr lang="zh-TW" altLang="en-US" smtClean="0"/>
-              <a:t>2026/5/14</a:t>
+              <a:t>2026/5/26</a:t>
             </a:fld>
             <a:endParaRPr lang="zh-TW" altLang="en-US"/>
           </a:p>
@@ -760,7 +764,7 @@
           <a:p>
             <a:fld id="{7E94FD5F-AE28-41FF-BA8E-7FE1DE9168D7}" type="datetimeFigureOut">
               <a:rPr lang="zh-TW" altLang="en-US" smtClean="0"/>
-              <a:t>2026/5/14</a:t>
+              <a:t>2026/5/26</a:t>
             </a:fld>
             <a:endParaRPr lang="zh-TW" altLang="en-US"/>
           </a:p>
@@ -930,7 +934,7 @@
           <a:p>
             <a:fld id="{7E94FD5F-AE28-41FF-BA8E-7FE1DE9168D7}" type="datetimeFigureOut">
               <a:rPr lang="zh-TW" altLang="en-US" smtClean="0"/>
-              <a:t>2026/5/14</a:t>
+              <a:t>2026/5/26</a:t>
             </a:fld>
             <a:endParaRPr lang="zh-TW" altLang="en-US"/>
           </a:p>
@@ -1110,7 +1114,7 @@
           <a:p>
             <a:fld id="{7E94FD5F-AE28-41FF-BA8E-7FE1DE9168D7}" type="datetimeFigureOut">
               <a:rPr lang="zh-TW" altLang="en-US" smtClean="0"/>
-              <a:t>2026/5/14</a:t>
+              <a:t>2026/5/26</a:t>
             </a:fld>
             <a:endParaRPr lang="zh-TW" altLang="en-US"/>
           </a:p>
@@ -1280,7 +1284,7 @@
           <a:p>
             <a:fld id="{7E94FD5F-AE28-41FF-BA8E-7FE1DE9168D7}" type="datetimeFigureOut">
               <a:rPr lang="zh-TW" altLang="en-US" smtClean="0"/>
-              <a:t>2026/5/14</a:t>
+              <a:t>2026/5/26</a:t>
             </a:fld>
             <a:endParaRPr lang="zh-TW" altLang="en-US"/>
           </a:p>
@@ -1526,7 +1530,7 @@
           <a:p>
             <a:fld id="{7E94FD5F-AE28-41FF-BA8E-7FE1DE9168D7}" type="datetimeFigureOut">
               <a:rPr lang="zh-TW" altLang="en-US" smtClean="0"/>
-              <a:t>2026/5/14</a:t>
+              <a:t>2026/5/26</a:t>
             </a:fld>
             <a:endParaRPr lang="zh-TW" altLang="en-US"/>
           </a:p>
@@ -1758,7 +1762,7 @@
           <a:p>
             <a:fld id="{7E94FD5F-AE28-41FF-BA8E-7FE1DE9168D7}" type="datetimeFigureOut">
               <a:rPr lang="zh-TW" altLang="en-US" smtClean="0"/>
-              <a:t>2026/5/14</a:t>
+              <a:t>2026/5/26</a:t>
             </a:fld>
             <a:endParaRPr lang="zh-TW" altLang="en-US"/>
           </a:p>
@@ -2125,7 +2129,7 @@
           <a:p>
             <a:fld id="{7E94FD5F-AE28-41FF-BA8E-7FE1DE9168D7}" type="datetimeFigureOut">
               <a:rPr lang="zh-TW" altLang="en-US" smtClean="0"/>
-              <a:t>2026/5/14</a:t>
+              <a:t>2026/5/26</a:t>
             </a:fld>
             <a:endParaRPr lang="zh-TW" altLang="en-US"/>
           </a:p>
@@ -2243,7 +2247,7 @@
           <a:p>
             <a:fld id="{7E94FD5F-AE28-41FF-BA8E-7FE1DE9168D7}" type="datetimeFigureOut">
               <a:rPr lang="zh-TW" altLang="en-US" smtClean="0"/>
-              <a:t>2026/5/14</a:t>
+              <a:t>2026/5/26</a:t>
             </a:fld>
             <a:endParaRPr lang="zh-TW" altLang="en-US"/>
           </a:p>
@@ -2338,7 +2342,7 @@
           <a:p>
             <a:fld id="{7E94FD5F-AE28-41FF-BA8E-7FE1DE9168D7}" type="datetimeFigureOut">
               <a:rPr lang="zh-TW" altLang="en-US" smtClean="0"/>
-              <a:t>2026/5/14</a:t>
+              <a:t>2026/5/26</a:t>
             </a:fld>
             <a:endParaRPr lang="zh-TW" altLang="en-US"/>
           </a:p>
@@ -2615,7 +2619,7 @@
           <a:p>
             <a:fld id="{7E94FD5F-AE28-41FF-BA8E-7FE1DE9168D7}" type="datetimeFigureOut">
               <a:rPr lang="zh-TW" altLang="en-US" smtClean="0"/>
-              <a:t>2026/5/14</a:t>
+              <a:t>2026/5/26</a:t>
             </a:fld>
             <a:endParaRPr lang="zh-TW" altLang="en-US"/>
           </a:p>
@@ -2872,7 +2876,7 @@
           <a:p>
             <a:fld id="{7E94FD5F-AE28-41FF-BA8E-7FE1DE9168D7}" type="datetimeFigureOut">
               <a:rPr lang="zh-TW" altLang="en-US" smtClean="0"/>
-              <a:t>2026/5/14</a:t>
+              <a:t>2026/5/26</a:t>
             </a:fld>
             <a:endParaRPr lang="zh-TW" altLang="en-US"/>
           </a:p>
@@ -3085,7 +3089,7 @@
           <a:p>
             <a:fld id="{7E94FD5F-AE28-41FF-BA8E-7FE1DE9168D7}" type="datetimeFigureOut">
               <a:rPr lang="zh-TW" altLang="en-US" smtClean="0"/>
-              <a:t>2026/5/14</a:t>
+              <a:t>2026/5/26</a:t>
             </a:fld>
             <a:endParaRPr lang="zh-TW" altLang="en-US"/>
           </a:p>
@@ -34149,6 +34153,2562 @@
       </p:grpSpPr>
       <p:sp>
         <p:nvSpPr>
+          <p:cNvPr id="4" name="矩形 3">
+            <a:extLst>
+              <a:ext uri="{FF2B5EF4-FFF2-40B4-BE49-F238E27FC236}">
+                <a16:creationId xmlns:a16="http://schemas.microsoft.com/office/drawing/2014/main" id="{9F2781C0-7915-4AC6-AF28-40B77C669121}"/>
+              </a:ext>
+            </a:extLst>
+          </p:cNvPr>
+          <p:cNvSpPr/>
+          <p:nvPr/>
+        </p:nvSpPr>
+        <p:spPr>
+          <a:xfrm>
+            <a:off x="2325189" y="814952"/>
+            <a:ext cx="15218228" cy="8752114"/>
+          </a:xfrm>
+          <a:prstGeom prst="rect">
+            <a:avLst/>
+          </a:prstGeom>
+          <a:noFill/>
+          <a:ln w="57150">
+            <a:solidFill>
+              <a:schemeClr val="tx1"/>
+            </a:solidFill>
+          </a:ln>
+        </p:spPr>
+        <p:style>
+          <a:lnRef idx="2">
+            <a:schemeClr val="accent1">
+              <a:shade val="50000"/>
+            </a:schemeClr>
+          </a:lnRef>
+          <a:fillRef idx="1">
+            <a:schemeClr val="accent1"/>
+          </a:fillRef>
+          <a:effectRef idx="0">
+            <a:schemeClr val="accent1"/>
+          </a:effectRef>
+          <a:fontRef idx="minor">
+            <a:schemeClr val="lt1"/>
+          </a:fontRef>
+        </p:style>
+        <p:txBody>
+          <a:bodyPr rtlCol="0" anchor="ctr"/>
+          <a:lstStyle/>
+          <a:p>
+            <a:pPr algn="ctr"/>
+            <a:endParaRPr lang="zh-TW" altLang="en-US" sz="5400" b="1"/>
+          </a:p>
+        </p:txBody>
+      </p:sp>
+      <p:sp>
+        <p:nvSpPr>
+          <p:cNvPr id="7" name="標題 1">
+            <a:extLst>
+              <a:ext uri="{FF2B5EF4-FFF2-40B4-BE49-F238E27FC236}">
+                <a16:creationId xmlns:a16="http://schemas.microsoft.com/office/drawing/2014/main" id="{C9D3FCC7-12DE-4AFA-84C8-E8BBD733315A}"/>
+              </a:ext>
+            </a:extLst>
+          </p:cNvPr>
+          <p:cNvSpPr txBox="1">
+            <a:spLocks/>
+          </p:cNvSpPr>
+          <p:nvPr/>
+        </p:nvSpPr>
+        <p:spPr>
+          <a:xfrm>
+            <a:off x="169818" y="627015"/>
+            <a:ext cx="2341369" cy="1084217"/>
+          </a:xfrm>
+          <a:prstGeom prst="rect">
+            <a:avLst/>
+          </a:prstGeom>
+        </p:spPr>
+        <p:txBody>
+          <a:bodyPr vert="horz" lIns="91440" tIns="45720" rIns="91440" bIns="45720" rtlCol="0" anchor="ctr">
+            <a:noAutofit/>
+          </a:bodyPr>
+          <a:lstStyle>
+            <a:lvl1pPr algn="l" defTabSz="1371600" rtl="0" eaLnBrk="1" latinLnBrk="0" hangingPunct="1">
+              <a:lnSpc>
+                <a:spcPct val="90000"/>
+              </a:lnSpc>
+              <a:spcBef>
+                <a:spcPct val="0"/>
+              </a:spcBef>
+              <a:buNone/>
+              <a:defRPr sz="6600" kern="1200">
+                <a:solidFill>
+                  <a:schemeClr val="tx1"/>
+                </a:solidFill>
+                <a:latin typeface="+mj-lt"/>
+                <a:ea typeface="+mj-ea"/>
+                <a:cs typeface="+mj-cs"/>
+              </a:defRPr>
+            </a:lvl1pPr>
+          </a:lstStyle>
+          <a:p>
+            <a:r>
+              <a:rPr lang="zh-TW" altLang="en-US" sz="4800" b="1" dirty="0">
+                <a:latin typeface="俐方體11號" pitchFamily="2" charset="-120"/>
+                <a:ea typeface="俐方體11號" pitchFamily="2" charset="-120"/>
+              </a:rPr>
+              <a:t>第二章</a:t>
+            </a:r>
+          </a:p>
+        </p:txBody>
+      </p:sp>
+      <p:sp>
+        <p:nvSpPr>
+          <p:cNvPr id="16" name="矩形 15">
+            <a:extLst>
+              <a:ext uri="{FF2B5EF4-FFF2-40B4-BE49-F238E27FC236}">
+                <a16:creationId xmlns:a16="http://schemas.microsoft.com/office/drawing/2014/main" id="{00FB009A-5FD5-4647-9E1A-13D19CE6D97B}"/>
+              </a:ext>
+            </a:extLst>
+          </p:cNvPr>
+          <p:cNvSpPr/>
+          <p:nvPr/>
+        </p:nvSpPr>
+        <p:spPr>
+          <a:xfrm>
+            <a:off x="12648135" y="1184898"/>
+            <a:ext cx="4516368" cy="7144502"/>
+          </a:xfrm>
+          <a:prstGeom prst="rect">
+            <a:avLst/>
+          </a:prstGeom>
+          <a:noFill/>
+          <a:ln w="57150">
+            <a:solidFill>
+              <a:schemeClr val="tx1"/>
+            </a:solidFill>
+          </a:ln>
+        </p:spPr>
+        <p:style>
+          <a:lnRef idx="2">
+            <a:schemeClr val="accent1">
+              <a:shade val="50000"/>
+            </a:schemeClr>
+          </a:lnRef>
+          <a:fillRef idx="1">
+            <a:schemeClr val="accent1"/>
+          </a:fillRef>
+          <a:effectRef idx="0">
+            <a:schemeClr val="accent1"/>
+          </a:effectRef>
+          <a:fontRef idx="minor">
+            <a:schemeClr val="lt1"/>
+          </a:fontRef>
+        </p:style>
+        <p:txBody>
+          <a:bodyPr rtlCol="0" anchor="ctr"/>
+          <a:lstStyle/>
+          <a:p>
+            <a:pPr algn="ctr"/>
+            <a:endParaRPr lang="zh-TW" altLang="en-US" sz="5400" b="1"/>
+          </a:p>
+        </p:txBody>
+      </p:sp>
+      <p:sp>
+        <p:nvSpPr>
+          <p:cNvPr id="20" name="矩形 19">
+            <a:extLst>
+              <a:ext uri="{FF2B5EF4-FFF2-40B4-BE49-F238E27FC236}">
+                <a16:creationId xmlns:a16="http://schemas.microsoft.com/office/drawing/2014/main" id="{26415D62-9E47-430A-A990-B02A60C6C5BD}"/>
+              </a:ext>
+            </a:extLst>
+          </p:cNvPr>
+          <p:cNvSpPr/>
+          <p:nvPr/>
+        </p:nvSpPr>
+        <p:spPr>
+          <a:xfrm>
+            <a:off x="2695952" y="1169123"/>
+            <a:ext cx="9573267" cy="7144502"/>
+          </a:xfrm>
+          <a:prstGeom prst="rect">
+            <a:avLst/>
+          </a:prstGeom>
+          <a:noFill/>
+          <a:ln w="57150">
+            <a:solidFill>
+              <a:schemeClr val="tx1"/>
+            </a:solidFill>
+          </a:ln>
+        </p:spPr>
+        <p:style>
+          <a:lnRef idx="2">
+            <a:schemeClr val="accent1">
+              <a:shade val="50000"/>
+            </a:schemeClr>
+          </a:lnRef>
+          <a:fillRef idx="1">
+            <a:schemeClr val="accent1"/>
+          </a:fillRef>
+          <a:effectRef idx="0">
+            <a:schemeClr val="accent1"/>
+          </a:effectRef>
+          <a:fontRef idx="minor">
+            <a:schemeClr val="lt1"/>
+          </a:fontRef>
+        </p:style>
+        <p:txBody>
+          <a:bodyPr rtlCol="0" anchor="ctr"/>
+          <a:lstStyle/>
+          <a:p>
+            <a:pPr algn="ctr"/>
+            <a:endParaRPr lang="zh-TW" altLang="en-US" sz="5400" b="1"/>
+          </a:p>
+        </p:txBody>
+      </p:sp>
+      <p:grpSp>
+        <p:nvGrpSpPr>
+          <p:cNvPr id="27" name="群組 26">
+            <a:extLst>
+              <a:ext uri="{FF2B5EF4-FFF2-40B4-BE49-F238E27FC236}">
+                <a16:creationId xmlns:a16="http://schemas.microsoft.com/office/drawing/2014/main" id="{37E2F93F-F4D8-4420-9681-941A15CE0A0D}"/>
+              </a:ext>
+            </a:extLst>
+          </p:cNvPr>
+          <p:cNvGrpSpPr/>
+          <p:nvPr/>
+        </p:nvGrpSpPr>
+        <p:grpSpPr>
+          <a:xfrm>
+            <a:off x="12648136" y="8570791"/>
+            <a:ext cx="2068582" cy="754884"/>
+            <a:chOff x="13492407" y="8570791"/>
+            <a:chExt cx="1657685" cy="754884"/>
+          </a:xfrm>
+        </p:grpSpPr>
+        <p:sp>
+          <p:nvSpPr>
+            <p:cNvPr id="11" name="矩形 10">
+              <a:extLst>
+                <a:ext uri="{FF2B5EF4-FFF2-40B4-BE49-F238E27FC236}">
+                  <a16:creationId xmlns:a16="http://schemas.microsoft.com/office/drawing/2014/main" id="{EEDDACBE-F216-46A4-B89F-0E3C1C4A195A}"/>
+                </a:ext>
+              </a:extLst>
+            </p:cNvPr>
+            <p:cNvSpPr/>
+            <p:nvPr/>
+          </p:nvSpPr>
+          <p:spPr>
+            <a:xfrm>
+              <a:off x="13492409" y="8570791"/>
+              <a:ext cx="1657683" cy="739109"/>
+            </a:xfrm>
+            <a:prstGeom prst="rect">
+              <a:avLst/>
+            </a:prstGeom>
+            <a:solidFill>
+              <a:schemeClr val="accent6"/>
+            </a:solidFill>
+            <a:ln w="57150">
+              <a:solidFill>
+                <a:schemeClr val="tx1"/>
+              </a:solidFill>
+            </a:ln>
+          </p:spPr>
+          <p:style>
+            <a:lnRef idx="2">
+              <a:schemeClr val="accent1">
+                <a:shade val="50000"/>
+              </a:schemeClr>
+            </a:lnRef>
+            <a:fillRef idx="1">
+              <a:schemeClr val="accent1"/>
+            </a:fillRef>
+            <a:effectRef idx="0">
+              <a:schemeClr val="accent1"/>
+            </a:effectRef>
+            <a:fontRef idx="minor">
+              <a:schemeClr val="lt1"/>
+            </a:fontRef>
+          </p:style>
+          <p:txBody>
+            <a:bodyPr rtlCol="0" anchor="ctr"/>
+            <a:lstStyle/>
+            <a:p>
+              <a:pPr algn="ctr"/>
+              <a:endParaRPr lang="zh-TW" altLang="en-US" sz="5400" b="1">
+                <a:solidFill>
+                  <a:schemeClr val="accent6"/>
+                </a:solidFill>
+              </a:endParaRPr>
+            </a:p>
+          </p:txBody>
+        </p:sp>
+        <p:sp>
+          <p:nvSpPr>
+            <p:cNvPr id="24" name="標題 1">
+              <a:extLst>
+                <a:ext uri="{FF2B5EF4-FFF2-40B4-BE49-F238E27FC236}">
+                  <a16:creationId xmlns:a16="http://schemas.microsoft.com/office/drawing/2014/main" id="{2C760EE5-0536-47C2-AD2D-288B98DB4C04}"/>
+                </a:ext>
+              </a:extLst>
+            </p:cNvPr>
+            <p:cNvSpPr txBox="1">
+              <a:spLocks/>
+            </p:cNvSpPr>
+            <p:nvPr/>
+          </p:nvSpPr>
+          <p:spPr>
+            <a:xfrm>
+              <a:off x="13492407" y="8586565"/>
+              <a:ext cx="1657683" cy="739110"/>
+            </a:xfrm>
+            <a:prstGeom prst="rect">
+              <a:avLst/>
+            </a:prstGeom>
+          </p:spPr>
+          <p:txBody>
+            <a:bodyPr vert="horz" lIns="91440" tIns="45720" rIns="91440" bIns="45720" rtlCol="0" anchor="ctr">
+              <a:noAutofit/>
+            </a:bodyPr>
+            <a:lstStyle>
+              <a:lvl1pPr algn="l" defTabSz="1371600" rtl="0" eaLnBrk="1" latinLnBrk="0" hangingPunct="1">
+                <a:lnSpc>
+                  <a:spcPct val="90000"/>
+                </a:lnSpc>
+                <a:spcBef>
+                  <a:spcPct val="0"/>
+                </a:spcBef>
+                <a:buNone/>
+                <a:defRPr sz="6600" kern="1200">
+                  <a:solidFill>
+                    <a:schemeClr val="tx1"/>
+                  </a:solidFill>
+                  <a:latin typeface="+mj-lt"/>
+                  <a:ea typeface="+mj-ea"/>
+                  <a:cs typeface="+mj-cs"/>
+                </a:defRPr>
+              </a:lvl1pPr>
+            </a:lstStyle>
+            <a:p>
+              <a:pPr algn="ctr"/>
+              <a:r>
+                <a:rPr lang="zh-TW" altLang="en-US" sz="3200" b="1" dirty="0">
+                  <a:solidFill>
+                    <a:schemeClr val="bg1"/>
+                  </a:solidFill>
+                  <a:latin typeface="俐方體11號" pitchFamily="2" charset="-120"/>
+                  <a:ea typeface="俐方體11號" pitchFamily="2" charset="-120"/>
+                </a:rPr>
+                <a:t>執行</a:t>
+              </a:r>
+            </a:p>
+          </p:txBody>
+        </p:sp>
+      </p:grpSp>
+      <p:grpSp>
+        <p:nvGrpSpPr>
+          <p:cNvPr id="28" name="群組 27">
+            <a:extLst>
+              <a:ext uri="{FF2B5EF4-FFF2-40B4-BE49-F238E27FC236}">
+                <a16:creationId xmlns:a16="http://schemas.microsoft.com/office/drawing/2014/main" id="{49D97BAD-26BE-4476-AAB1-E86360ECF72F}"/>
+              </a:ext>
+            </a:extLst>
+          </p:cNvPr>
+          <p:cNvGrpSpPr/>
+          <p:nvPr/>
+        </p:nvGrpSpPr>
+        <p:grpSpPr>
+          <a:xfrm>
+            <a:off x="15095634" y="8570791"/>
+            <a:ext cx="2068870" cy="739109"/>
+            <a:chOff x="15592046" y="8570791"/>
+            <a:chExt cx="1657684" cy="739109"/>
+          </a:xfrm>
+        </p:grpSpPr>
+        <p:sp>
+          <p:nvSpPr>
+            <p:cNvPr id="12" name="矩形 11">
+              <a:extLst>
+                <a:ext uri="{FF2B5EF4-FFF2-40B4-BE49-F238E27FC236}">
+                  <a16:creationId xmlns:a16="http://schemas.microsoft.com/office/drawing/2014/main" id="{EA176B58-5CEB-4853-BE39-967D6989DC5D}"/>
+                </a:ext>
+              </a:extLst>
+            </p:cNvPr>
+            <p:cNvSpPr/>
+            <p:nvPr/>
+          </p:nvSpPr>
+          <p:spPr>
+            <a:xfrm>
+              <a:off x="15592047" y="8570791"/>
+              <a:ext cx="1657683" cy="739109"/>
+            </a:xfrm>
+            <a:prstGeom prst="rect">
+              <a:avLst/>
+            </a:prstGeom>
+            <a:solidFill>
+              <a:srgbClr val="FF0000"/>
+            </a:solidFill>
+            <a:ln w="57150">
+              <a:solidFill>
+                <a:schemeClr val="tx1"/>
+              </a:solidFill>
+            </a:ln>
+          </p:spPr>
+          <p:style>
+            <a:lnRef idx="2">
+              <a:schemeClr val="accent1">
+                <a:shade val="50000"/>
+              </a:schemeClr>
+            </a:lnRef>
+            <a:fillRef idx="1">
+              <a:schemeClr val="accent1"/>
+            </a:fillRef>
+            <a:effectRef idx="0">
+              <a:schemeClr val="accent1"/>
+            </a:effectRef>
+            <a:fontRef idx="minor">
+              <a:schemeClr val="lt1"/>
+            </a:fontRef>
+          </p:style>
+          <p:txBody>
+            <a:bodyPr rtlCol="0" anchor="ctr"/>
+            <a:lstStyle/>
+            <a:p>
+              <a:pPr algn="ctr"/>
+              <a:endParaRPr lang="zh-TW" altLang="en-US" sz="5400" b="1"/>
+            </a:p>
+          </p:txBody>
+        </p:sp>
+        <p:sp>
+          <p:nvSpPr>
+            <p:cNvPr id="25" name="標題 1">
+              <a:extLst>
+                <a:ext uri="{FF2B5EF4-FFF2-40B4-BE49-F238E27FC236}">
+                  <a16:creationId xmlns:a16="http://schemas.microsoft.com/office/drawing/2014/main" id="{00B56794-98F3-4820-9ED2-0AE46E2A955D}"/>
+                </a:ext>
+              </a:extLst>
+            </p:cNvPr>
+            <p:cNvSpPr txBox="1">
+              <a:spLocks/>
+            </p:cNvSpPr>
+            <p:nvPr/>
+          </p:nvSpPr>
+          <p:spPr>
+            <a:xfrm>
+              <a:off x="15592046" y="8570791"/>
+              <a:ext cx="1657682" cy="739109"/>
+            </a:xfrm>
+            <a:prstGeom prst="rect">
+              <a:avLst/>
+            </a:prstGeom>
+          </p:spPr>
+          <p:txBody>
+            <a:bodyPr vert="horz" lIns="91440" tIns="45720" rIns="91440" bIns="45720" rtlCol="0" anchor="ctr">
+              <a:noAutofit/>
+            </a:bodyPr>
+            <a:lstStyle>
+              <a:lvl1pPr algn="l" defTabSz="1371600" rtl="0" eaLnBrk="1" latinLnBrk="0" hangingPunct="1">
+                <a:lnSpc>
+                  <a:spcPct val="90000"/>
+                </a:lnSpc>
+                <a:spcBef>
+                  <a:spcPct val="0"/>
+                </a:spcBef>
+                <a:buNone/>
+                <a:defRPr sz="6600" kern="1200">
+                  <a:solidFill>
+                    <a:schemeClr val="tx1"/>
+                  </a:solidFill>
+                  <a:latin typeface="+mj-lt"/>
+                  <a:ea typeface="+mj-ea"/>
+                  <a:cs typeface="+mj-cs"/>
+                </a:defRPr>
+              </a:lvl1pPr>
+            </a:lstStyle>
+            <a:p>
+              <a:pPr algn="ctr"/>
+              <a:r>
+                <a:rPr lang="zh-TW" altLang="en-US" sz="3200" b="1" dirty="0">
+                  <a:solidFill>
+                    <a:schemeClr val="bg1"/>
+                  </a:solidFill>
+                  <a:latin typeface="俐方體11號" pitchFamily="2" charset="-120"/>
+                  <a:ea typeface="俐方體11號" pitchFamily="2" charset="-120"/>
+                </a:rPr>
+                <a:t>重設</a:t>
+              </a:r>
+            </a:p>
+          </p:txBody>
+        </p:sp>
+      </p:grpSp>
+      <p:sp>
+        <p:nvSpPr>
+          <p:cNvPr id="30" name="矩形 29">
+            <a:extLst>
+              <a:ext uri="{FF2B5EF4-FFF2-40B4-BE49-F238E27FC236}">
+                <a16:creationId xmlns:a16="http://schemas.microsoft.com/office/drawing/2014/main" id="{1E02C2F4-0EE0-4985-9F05-461B41BB1992}"/>
+              </a:ext>
+            </a:extLst>
+          </p:cNvPr>
+          <p:cNvSpPr/>
+          <p:nvPr/>
+        </p:nvSpPr>
+        <p:spPr>
+          <a:xfrm>
+            <a:off x="16554734" y="1343105"/>
+            <a:ext cx="419280" cy="6818256"/>
+          </a:xfrm>
+          <a:prstGeom prst="rect">
+            <a:avLst/>
+          </a:prstGeom>
+          <a:noFill/>
+          <a:ln w="57150">
+            <a:solidFill>
+              <a:schemeClr val="tx1"/>
+            </a:solidFill>
+          </a:ln>
+        </p:spPr>
+        <p:style>
+          <a:lnRef idx="2">
+            <a:schemeClr val="accent1">
+              <a:shade val="50000"/>
+            </a:schemeClr>
+          </a:lnRef>
+          <a:fillRef idx="1">
+            <a:schemeClr val="accent1"/>
+          </a:fillRef>
+          <a:effectRef idx="0">
+            <a:schemeClr val="accent1"/>
+          </a:effectRef>
+          <a:fontRef idx="minor">
+            <a:schemeClr val="lt1"/>
+          </a:fontRef>
+        </p:style>
+        <p:txBody>
+          <a:bodyPr rtlCol="0" anchor="ctr"/>
+          <a:lstStyle/>
+          <a:p>
+            <a:pPr algn="ctr"/>
+            <a:endParaRPr lang="zh-TW" altLang="en-US" sz="5400" b="1"/>
+          </a:p>
+        </p:txBody>
+      </p:sp>
+      <p:sp>
+        <p:nvSpPr>
+          <p:cNvPr id="31" name="矩形 30">
+            <a:extLst>
+              <a:ext uri="{FF2B5EF4-FFF2-40B4-BE49-F238E27FC236}">
+                <a16:creationId xmlns:a16="http://schemas.microsoft.com/office/drawing/2014/main" id="{8872FF75-7DED-4C10-A216-62FD50CE8141}"/>
+              </a:ext>
+            </a:extLst>
+          </p:cNvPr>
+          <p:cNvSpPr/>
+          <p:nvPr/>
+        </p:nvSpPr>
+        <p:spPr>
+          <a:xfrm>
+            <a:off x="11678036" y="1343105"/>
+            <a:ext cx="419280" cy="6818256"/>
+          </a:xfrm>
+          <a:prstGeom prst="rect">
+            <a:avLst/>
+          </a:prstGeom>
+          <a:noFill/>
+          <a:ln w="57150">
+            <a:solidFill>
+              <a:schemeClr val="tx1"/>
+            </a:solidFill>
+          </a:ln>
+        </p:spPr>
+        <p:style>
+          <a:lnRef idx="2">
+            <a:schemeClr val="accent1">
+              <a:shade val="50000"/>
+            </a:schemeClr>
+          </a:lnRef>
+          <a:fillRef idx="1">
+            <a:schemeClr val="accent1"/>
+          </a:fillRef>
+          <a:effectRef idx="0">
+            <a:schemeClr val="accent1"/>
+          </a:effectRef>
+          <a:fontRef idx="minor">
+            <a:schemeClr val="lt1"/>
+          </a:fontRef>
+        </p:style>
+        <p:txBody>
+          <a:bodyPr rtlCol="0" anchor="ctr"/>
+          <a:lstStyle/>
+          <a:p>
+            <a:pPr algn="ctr"/>
+            <a:endParaRPr lang="zh-TW" altLang="en-US" sz="5400" b="1"/>
+          </a:p>
+        </p:txBody>
+      </p:sp>
+      <p:sp>
+        <p:nvSpPr>
+          <p:cNvPr id="32" name="標題 1">
+            <a:extLst>
+              <a:ext uri="{FF2B5EF4-FFF2-40B4-BE49-F238E27FC236}">
+                <a16:creationId xmlns:a16="http://schemas.microsoft.com/office/drawing/2014/main" id="{D27588B4-91A3-4244-8E95-D5B54CE5E369}"/>
+              </a:ext>
+            </a:extLst>
+          </p:cNvPr>
+          <p:cNvSpPr txBox="1">
+            <a:spLocks/>
+          </p:cNvSpPr>
+          <p:nvPr/>
+        </p:nvSpPr>
+        <p:spPr>
+          <a:xfrm>
+            <a:off x="12812279" y="1128179"/>
+            <a:ext cx="2341369" cy="1084217"/>
+          </a:xfrm>
+          <a:prstGeom prst="rect">
+            <a:avLst/>
+          </a:prstGeom>
+        </p:spPr>
+        <p:txBody>
+          <a:bodyPr vert="horz" lIns="91440" tIns="45720" rIns="91440" bIns="45720" rtlCol="0" anchor="ctr">
+            <a:noAutofit/>
+          </a:bodyPr>
+          <a:lstStyle>
+            <a:lvl1pPr algn="l" defTabSz="1371600" rtl="0" eaLnBrk="1" latinLnBrk="0" hangingPunct="1">
+              <a:lnSpc>
+                <a:spcPct val="90000"/>
+              </a:lnSpc>
+              <a:spcBef>
+                <a:spcPct val="0"/>
+              </a:spcBef>
+              <a:buNone/>
+              <a:defRPr sz="6600" kern="1200">
+                <a:solidFill>
+                  <a:schemeClr val="tx1"/>
+                </a:solidFill>
+                <a:latin typeface="+mj-lt"/>
+                <a:ea typeface="+mj-ea"/>
+                <a:cs typeface="+mj-cs"/>
+              </a:defRPr>
+            </a:lvl1pPr>
+          </a:lstStyle>
+          <a:p>
+            <a:r>
+              <a:rPr lang="zh-TW" altLang="en-US" sz="3200" b="1" dirty="0">
+                <a:solidFill>
+                  <a:schemeClr val="accent1"/>
+                </a:solidFill>
+                <a:latin typeface="俐方體11號" pitchFamily="2" charset="-120"/>
+                <a:ea typeface="俐方體11號" pitchFamily="2" charset="-120"/>
+              </a:rPr>
+              <a:t>動詞</a:t>
+            </a:r>
+            <a:r>
+              <a:rPr lang="zh-TW" altLang="en-US" sz="3200" b="1" dirty="0">
+                <a:latin typeface="俐方體11號" pitchFamily="2" charset="-120"/>
+                <a:ea typeface="俐方體11號" pitchFamily="2" charset="-120"/>
+              </a:rPr>
+              <a:t>  </a:t>
+            </a:r>
+            <a:r>
+              <a:rPr lang="zh-TW" altLang="en-US" sz="3200" b="1" dirty="0">
+                <a:solidFill>
+                  <a:schemeClr val="accent2"/>
+                </a:solidFill>
+                <a:latin typeface="俐方體11號" pitchFamily="2" charset="-120"/>
+                <a:ea typeface="俐方體11號" pitchFamily="2" charset="-120"/>
+              </a:rPr>
+              <a:t>名詞</a:t>
+            </a:r>
+          </a:p>
+        </p:txBody>
+      </p:sp>
+      <p:sp>
+        <p:nvSpPr>
+          <p:cNvPr id="33" name="文字方塊 32">
+            <a:extLst>
+              <a:ext uri="{FF2B5EF4-FFF2-40B4-BE49-F238E27FC236}">
+                <a16:creationId xmlns:a16="http://schemas.microsoft.com/office/drawing/2014/main" id="{A1EF1806-DE69-4CAD-AD57-1D0CB5DD67EA}"/>
+              </a:ext>
+            </a:extLst>
+          </p:cNvPr>
+          <p:cNvSpPr txBox="1"/>
+          <p:nvPr/>
+        </p:nvSpPr>
+        <p:spPr>
+          <a:xfrm>
+            <a:off x="2988978" y="1343106"/>
+            <a:ext cx="7560862" cy="4832092"/>
+          </a:xfrm>
+          <a:prstGeom prst="rect">
+            <a:avLst/>
+          </a:prstGeom>
+          <a:noFill/>
+        </p:spPr>
+        <p:txBody>
+          <a:bodyPr wrap="square">
+            <a:spAutoFit/>
+          </a:bodyPr>
+          <a:lstStyle/>
+          <a:p>
+            <a:r>
+              <a:rPr lang="zh-TW" altLang="en-US" sz="4400" b="1" dirty="0">
+                <a:latin typeface="俐方體11號" pitchFamily="2" charset="-120"/>
+                <a:ea typeface="俐方體11號" pitchFamily="2" charset="-120"/>
+              </a:rPr>
+              <a:t>我好我好我好我好我好我好我好我好我好我我好我好我好我好我好我好我好我好我好我好我好我好我好我好我好我好我好我好我好我好</a:t>
+            </a:r>
+          </a:p>
+          <a:p>
+            <a:r>
+              <a:rPr lang="zh-TW" altLang="en-US" sz="4400" b="1" dirty="0">
+                <a:latin typeface="俐方體11號" pitchFamily="2" charset="-120"/>
+                <a:ea typeface="俐方體11號" pitchFamily="2" charset="-120"/>
+              </a:rPr>
+              <a:t>我好我好我好我好我好我好我好我好我好</a:t>
+            </a:r>
+          </a:p>
+        </p:txBody>
+      </p:sp>
+      <p:sp>
+        <p:nvSpPr>
+          <p:cNvPr id="29" name="標題 1">
+            <a:extLst>
+              <a:ext uri="{FF2B5EF4-FFF2-40B4-BE49-F238E27FC236}">
+                <a16:creationId xmlns:a16="http://schemas.microsoft.com/office/drawing/2014/main" id="{94C92804-AE1D-44C9-9B8A-C4DFE88FB1A3}"/>
+              </a:ext>
+            </a:extLst>
+          </p:cNvPr>
+          <p:cNvSpPr txBox="1">
+            <a:spLocks/>
+          </p:cNvSpPr>
+          <p:nvPr/>
+        </p:nvSpPr>
+        <p:spPr>
+          <a:xfrm>
+            <a:off x="4182535" y="8570791"/>
+            <a:ext cx="1192034" cy="739109"/>
+          </a:xfrm>
+          <a:prstGeom prst="rect">
+            <a:avLst/>
+          </a:prstGeom>
+        </p:spPr>
+        <p:txBody>
+          <a:bodyPr vert="horz" lIns="91440" tIns="45720" rIns="91440" bIns="45720" rtlCol="0" anchor="ctr">
+            <a:noAutofit/>
+          </a:bodyPr>
+          <a:lstStyle>
+            <a:lvl1pPr algn="l" defTabSz="1371600" rtl="0" eaLnBrk="1" latinLnBrk="0" hangingPunct="1">
+              <a:lnSpc>
+                <a:spcPct val="90000"/>
+              </a:lnSpc>
+              <a:spcBef>
+                <a:spcPct val="0"/>
+              </a:spcBef>
+              <a:buNone/>
+              <a:defRPr sz="6600" kern="1200">
+                <a:solidFill>
+                  <a:schemeClr val="tx1"/>
+                </a:solidFill>
+                <a:latin typeface="+mj-lt"/>
+                <a:ea typeface="+mj-ea"/>
+                <a:cs typeface="+mj-cs"/>
+              </a:defRPr>
+            </a:lvl1pPr>
+          </a:lstStyle>
+          <a:p>
+            <a:pPr algn="ctr"/>
+            <a:r>
+              <a:rPr lang="en-US" altLang="zh-TW" sz="4800" b="1" dirty="0">
+                <a:latin typeface="俐方體11號" pitchFamily="2" charset="-120"/>
+                <a:ea typeface="俐方體11號" pitchFamily="2" charset="-120"/>
+              </a:rPr>
+              <a:t>+</a:t>
+            </a:r>
+            <a:endParaRPr lang="zh-TW" altLang="en-US" sz="4800" b="1" dirty="0">
+              <a:latin typeface="俐方體11號" pitchFamily="2" charset="-120"/>
+              <a:ea typeface="俐方體11號" pitchFamily="2" charset="-120"/>
+            </a:endParaRPr>
+          </a:p>
+        </p:txBody>
+      </p:sp>
+      <p:sp>
+        <p:nvSpPr>
+          <p:cNvPr id="34" name="標題 1">
+            <a:extLst>
+              <a:ext uri="{FF2B5EF4-FFF2-40B4-BE49-F238E27FC236}">
+                <a16:creationId xmlns:a16="http://schemas.microsoft.com/office/drawing/2014/main" id="{A11967BE-B444-471C-9DBA-9422D68895F9}"/>
+              </a:ext>
+            </a:extLst>
+          </p:cNvPr>
+          <p:cNvSpPr txBox="1">
+            <a:spLocks/>
+          </p:cNvSpPr>
+          <p:nvPr/>
+        </p:nvSpPr>
+        <p:spPr>
+          <a:xfrm>
+            <a:off x="6690052" y="8570791"/>
+            <a:ext cx="1192034" cy="739109"/>
+          </a:xfrm>
+          <a:prstGeom prst="rect">
+            <a:avLst/>
+          </a:prstGeom>
+        </p:spPr>
+        <p:txBody>
+          <a:bodyPr vert="horz" lIns="91440" tIns="45720" rIns="91440" bIns="45720" rtlCol="0" anchor="ctr">
+            <a:noAutofit/>
+          </a:bodyPr>
+          <a:lstStyle>
+            <a:lvl1pPr algn="l" defTabSz="1371600" rtl="0" eaLnBrk="1" latinLnBrk="0" hangingPunct="1">
+              <a:lnSpc>
+                <a:spcPct val="90000"/>
+              </a:lnSpc>
+              <a:spcBef>
+                <a:spcPct val="0"/>
+              </a:spcBef>
+              <a:buNone/>
+              <a:defRPr sz="6600" kern="1200">
+                <a:solidFill>
+                  <a:schemeClr val="tx1"/>
+                </a:solidFill>
+                <a:latin typeface="+mj-lt"/>
+                <a:ea typeface="+mj-ea"/>
+                <a:cs typeface="+mj-cs"/>
+              </a:defRPr>
+            </a:lvl1pPr>
+          </a:lstStyle>
+          <a:p>
+            <a:pPr algn="ctr"/>
+            <a:r>
+              <a:rPr lang="en-US" altLang="zh-TW" sz="4800" b="1" dirty="0">
+                <a:latin typeface="俐方體11號" pitchFamily="2" charset="-120"/>
+                <a:ea typeface="俐方體11號" pitchFamily="2" charset="-120"/>
+              </a:rPr>
+              <a:t>+</a:t>
+            </a:r>
+            <a:endParaRPr lang="zh-TW" altLang="en-US" sz="4800" b="1" dirty="0">
+              <a:latin typeface="俐方體11號" pitchFamily="2" charset="-120"/>
+              <a:ea typeface="俐方體11號" pitchFamily="2" charset="-120"/>
+            </a:endParaRPr>
+          </a:p>
+        </p:txBody>
+      </p:sp>
+      <p:grpSp>
+        <p:nvGrpSpPr>
+          <p:cNvPr id="35" name="群組 34">
+            <a:extLst>
+              <a:ext uri="{FF2B5EF4-FFF2-40B4-BE49-F238E27FC236}">
+                <a16:creationId xmlns:a16="http://schemas.microsoft.com/office/drawing/2014/main" id="{46B8C2BE-C04D-4F8D-995D-85B3C83E145E}"/>
+              </a:ext>
+            </a:extLst>
+          </p:cNvPr>
+          <p:cNvGrpSpPr/>
+          <p:nvPr/>
+        </p:nvGrpSpPr>
+        <p:grpSpPr>
+          <a:xfrm>
+            <a:off x="5203468" y="8570791"/>
+            <a:ext cx="1657685" cy="739109"/>
+            <a:chOff x="5754012" y="8570791"/>
+            <a:chExt cx="1657685" cy="739109"/>
+          </a:xfrm>
+        </p:grpSpPr>
+        <p:sp>
+          <p:nvSpPr>
+            <p:cNvPr id="36" name="矩形 35">
+              <a:extLst>
+                <a:ext uri="{FF2B5EF4-FFF2-40B4-BE49-F238E27FC236}">
+                  <a16:creationId xmlns:a16="http://schemas.microsoft.com/office/drawing/2014/main" id="{B5F93282-4E2D-4828-90D4-621BED52DECF}"/>
+                </a:ext>
+              </a:extLst>
+            </p:cNvPr>
+            <p:cNvSpPr/>
+            <p:nvPr/>
+          </p:nvSpPr>
+          <p:spPr>
+            <a:xfrm>
+              <a:off x="5754014" y="8570791"/>
+              <a:ext cx="1657683" cy="739109"/>
+            </a:xfrm>
+            <a:prstGeom prst="rect">
+              <a:avLst/>
+            </a:prstGeom>
+            <a:noFill/>
+            <a:ln w="57150">
+              <a:solidFill>
+                <a:schemeClr val="tx1"/>
+              </a:solidFill>
+            </a:ln>
+          </p:spPr>
+          <p:style>
+            <a:lnRef idx="2">
+              <a:schemeClr val="accent1">
+                <a:shade val="50000"/>
+              </a:schemeClr>
+            </a:lnRef>
+            <a:fillRef idx="1">
+              <a:schemeClr val="accent1"/>
+            </a:fillRef>
+            <a:effectRef idx="0">
+              <a:schemeClr val="accent1"/>
+            </a:effectRef>
+            <a:fontRef idx="minor">
+              <a:schemeClr val="lt1"/>
+            </a:fontRef>
+          </p:style>
+          <p:txBody>
+            <a:bodyPr rtlCol="0" anchor="ctr"/>
+            <a:lstStyle/>
+            <a:p>
+              <a:pPr algn="ctr"/>
+              <a:endParaRPr lang="zh-TW" altLang="en-US" sz="5400" b="1"/>
+            </a:p>
+          </p:txBody>
+        </p:sp>
+        <p:sp>
+          <p:nvSpPr>
+            <p:cNvPr id="37" name="標題 1">
+              <a:extLst>
+                <a:ext uri="{FF2B5EF4-FFF2-40B4-BE49-F238E27FC236}">
+                  <a16:creationId xmlns:a16="http://schemas.microsoft.com/office/drawing/2014/main" id="{6E465660-8901-4CFE-9188-E8C9BF767D20}"/>
+                </a:ext>
+              </a:extLst>
+            </p:cNvPr>
+            <p:cNvSpPr txBox="1">
+              <a:spLocks/>
+            </p:cNvSpPr>
+            <p:nvPr/>
+          </p:nvSpPr>
+          <p:spPr>
+            <a:xfrm>
+              <a:off x="5754012" y="8570791"/>
+              <a:ext cx="1657683" cy="739109"/>
+            </a:xfrm>
+            <a:prstGeom prst="rect">
+              <a:avLst/>
+            </a:prstGeom>
+          </p:spPr>
+          <p:txBody>
+            <a:bodyPr vert="horz" lIns="91440" tIns="45720" rIns="91440" bIns="45720" rtlCol="0" anchor="ctr">
+              <a:noAutofit/>
+            </a:bodyPr>
+            <a:lstStyle>
+              <a:lvl1pPr algn="l" defTabSz="1371600" rtl="0" eaLnBrk="1" latinLnBrk="0" hangingPunct="1">
+                <a:lnSpc>
+                  <a:spcPct val="90000"/>
+                </a:lnSpc>
+                <a:spcBef>
+                  <a:spcPct val="0"/>
+                </a:spcBef>
+                <a:buNone/>
+                <a:defRPr sz="6600" kern="1200">
+                  <a:solidFill>
+                    <a:schemeClr val="tx1"/>
+                  </a:solidFill>
+                  <a:latin typeface="+mj-lt"/>
+                  <a:ea typeface="+mj-ea"/>
+                  <a:cs typeface="+mj-cs"/>
+                </a:defRPr>
+              </a:lvl1pPr>
+            </a:lstStyle>
+            <a:p>
+              <a:pPr algn="ctr"/>
+              <a:r>
+                <a:rPr lang="zh-TW" altLang="en-US" sz="3200" b="1" dirty="0">
+                  <a:solidFill>
+                    <a:schemeClr val="accent1"/>
+                  </a:solidFill>
+                  <a:latin typeface="俐方體11號" pitchFamily="2" charset="-120"/>
+                  <a:ea typeface="俐方體11號" pitchFamily="2" charset="-120"/>
+                </a:rPr>
+                <a:t>動詞</a:t>
+              </a:r>
+            </a:p>
+          </p:txBody>
+        </p:sp>
+      </p:grpSp>
+      <p:grpSp>
+        <p:nvGrpSpPr>
+          <p:cNvPr id="38" name="群組 37">
+            <a:extLst>
+              <a:ext uri="{FF2B5EF4-FFF2-40B4-BE49-F238E27FC236}">
+                <a16:creationId xmlns:a16="http://schemas.microsoft.com/office/drawing/2014/main" id="{3B060101-2519-466B-BF7B-D1995FA45927}"/>
+              </a:ext>
+            </a:extLst>
+          </p:cNvPr>
+          <p:cNvGrpSpPr/>
+          <p:nvPr/>
+        </p:nvGrpSpPr>
+        <p:grpSpPr>
+          <a:xfrm>
+            <a:off x="7710985" y="8586565"/>
+            <a:ext cx="4558234" cy="748467"/>
+            <a:chOff x="8812075" y="8561434"/>
+            <a:chExt cx="4238380" cy="748467"/>
+          </a:xfrm>
+        </p:grpSpPr>
+        <p:sp>
+          <p:nvSpPr>
+            <p:cNvPr id="39" name="矩形 38">
+              <a:extLst>
+                <a:ext uri="{FF2B5EF4-FFF2-40B4-BE49-F238E27FC236}">
+                  <a16:creationId xmlns:a16="http://schemas.microsoft.com/office/drawing/2014/main" id="{7494A797-68BF-40B7-860D-18E98AEF3433}"/>
+                </a:ext>
+              </a:extLst>
+            </p:cNvPr>
+            <p:cNvSpPr/>
+            <p:nvPr/>
+          </p:nvSpPr>
+          <p:spPr>
+            <a:xfrm>
+              <a:off x="8812077" y="8570791"/>
+              <a:ext cx="4238378" cy="739109"/>
+            </a:xfrm>
+            <a:prstGeom prst="rect">
+              <a:avLst/>
+            </a:prstGeom>
+            <a:noFill/>
+            <a:ln w="57150">
+              <a:solidFill>
+                <a:schemeClr val="tx1"/>
+              </a:solidFill>
+            </a:ln>
+          </p:spPr>
+          <p:style>
+            <a:lnRef idx="2">
+              <a:schemeClr val="accent1">
+                <a:shade val="50000"/>
+              </a:schemeClr>
+            </a:lnRef>
+            <a:fillRef idx="1">
+              <a:schemeClr val="accent1"/>
+            </a:fillRef>
+            <a:effectRef idx="0">
+              <a:schemeClr val="accent1"/>
+            </a:effectRef>
+            <a:fontRef idx="minor">
+              <a:schemeClr val="lt1"/>
+            </a:fontRef>
+          </p:style>
+          <p:txBody>
+            <a:bodyPr rtlCol="0" anchor="ctr"/>
+            <a:lstStyle/>
+            <a:p>
+              <a:pPr algn="ctr"/>
+              <a:endParaRPr lang="zh-TW" altLang="en-US" sz="5400" b="1"/>
+            </a:p>
+          </p:txBody>
+        </p:sp>
+        <p:sp>
+          <p:nvSpPr>
+            <p:cNvPr id="40" name="標題 1">
+              <a:extLst>
+                <a:ext uri="{FF2B5EF4-FFF2-40B4-BE49-F238E27FC236}">
+                  <a16:creationId xmlns:a16="http://schemas.microsoft.com/office/drawing/2014/main" id="{A46B63D1-92B0-4C44-87C0-BBC59DFEF728}"/>
+                </a:ext>
+              </a:extLst>
+            </p:cNvPr>
+            <p:cNvSpPr txBox="1">
+              <a:spLocks/>
+            </p:cNvSpPr>
+            <p:nvPr/>
+          </p:nvSpPr>
+          <p:spPr>
+            <a:xfrm>
+              <a:off x="8812075" y="8561434"/>
+              <a:ext cx="4238378" cy="748467"/>
+            </a:xfrm>
+            <a:prstGeom prst="rect">
+              <a:avLst/>
+            </a:prstGeom>
+          </p:spPr>
+          <p:txBody>
+            <a:bodyPr vert="horz" lIns="91440" tIns="45720" rIns="91440" bIns="45720" rtlCol="0" anchor="ctr">
+              <a:noAutofit/>
+            </a:bodyPr>
+            <a:lstStyle>
+              <a:lvl1pPr algn="l" defTabSz="1371600" rtl="0" eaLnBrk="1" latinLnBrk="0" hangingPunct="1">
+                <a:lnSpc>
+                  <a:spcPct val="90000"/>
+                </a:lnSpc>
+                <a:spcBef>
+                  <a:spcPct val="0"/>
+                </a:spcBef>
+                <a:buNone/>
+                <a:defRPr sz="6600" kern="1200">
+                  <a:solidFill>
+                    <a:schemeClr val="tx1"/>
+                  </a:solidFill>
+                  <a:latin typeface="+mj-lt"/>
+                  <a:ea typeface="+mj-ea"/>
+                  <a:cs typeface="+mj-cs"/>
+                </a:defRPr>
+              </a:lvl1pPr>
+            </a:lstStyle>
+            <a:p>
+              <a:pPr algn="ctr"/>
+              <a:r>
+                <a:rPr lang="zh-TW" altLang="en-US" sz="3200" b="1" dirty="0">
+                  <a:solidFill>
+                    <a:schemeClr val="accent2"/>
+                  </a:solidFill>
+                  <a:latin typeface="俐方體11號" pitchFamily="2" charset="-120"/>
+                  <a:ea typeface="俐方體11號" pitchFamily="2" charset="-120"/>
+                </a:rPr>
+                <a:t>名詞</a:t>
+              </a:r>
+            </a:p>
+          </p:txBody>
+        </p:sp>
+      </p:grpSp>
+      <p:grpSp>
+        <p:nvGrpSpPr>
+          <p:cNvPr id="41" name="群組 40">
+            <a:extLst>
+              <a:ext uri="{FF2B5EF4-FFF2-40B4-BE49-F238E27FC236}">
+                <a16:creationId xmlns:a16="http://schemas.microsoft.com/office/drawing/2014/main" id="{F0556375-1A84-49EC-9517-A1084D7FCDD3}"/>
+              </a:ext>
+            </a:extLst>
+          </p:cNvPr>
+          <p:cNvGrpSpPr/>
+          <p:nvPr/>
+        </p:nvGrpSpPr>
+        <p:grpSpPr>
+          <a:xfrm>
+            <a:off x="2695951" y="8570791"/>
+            <a:ext cx="1657685" cy="739109"/>
+            <a:chOff x="2695951" y="8570791"/>
+            <a:chExt cx="1657685" cy="739109"/>
+          </a:xfrm>
+        </p:grpSpPr>
+        <p:sp>
+          <p:nvSpPr>
+            <p:cNvPr id="42" name="矩形 41">
+              <a:extLst>
+                <a:ext uri="{FF2B5EF4-FFF2-40B4-BE49-F238E27FC236}">
+                  <a16:creationId xmlns:a16="http://schemas.microsoft.com/office/drawing/2014/main" id="{0D1518AC-AED5-452A-B24B-E058439824C2}"/>
+                </a:ext>
+              </a:extLst>
+            </p:cNvPr>
+            <p:cNvSpPr/>
+            <p:nvPr/>
+          </p:nvSpPr>
+          <p:spPr>
+            <a:xfrm>
+              <a:off x="2695953" y="8570791"/>
+              <a:ext cx="1657683" cy="739109"/>
+            </a:xfrm>
+            <a:prstGeom prst="rect">
+              <a:avLst/>
+            </a:prstGeom>
+            <a:noFill/>
+            <a:ln w="57150">
+              <a:solidFill>
+                <a:schemeClr val="tx1"/>
+              </a:solidFill>
+            </a:ln>
+          </p:spPr>
+          <p:style>
+            <a:lnRef idx="2">
+              <a:schemeClr val="accent1">
+                <a:shade val="50000"/>
+              </a:schemeClr>
+            </a:lnRef>
+            <a:fillRef idx="1">
+              <a:schemeClr val="accent1"/>
+            </a:fillRef>
+            <a:effectRef idx="0">
+              <a:schemeClr val="accent1"/>
+            </a:effectRef>
+            <a:fontRef idx="minor">
+              <a:schemeClr val="lt1"/>
+            </a:fontRef>
+          </p:style>
+          <p:txBody>
+            <a:bodyPr rtlCol="0" anchor="ctr"/>
+            <a:lstStyle/>
+            <a:p>
+              <a:pPr algn="ctr"/>
+              <a:endParaRPr lang="zh-TW" altLang="en-US" sz="5400" b="1"/>
+            </a:p>
+          </p:txBody>
+        </p:sp>
+        <p:sp>
+          <p:nvSpPr>
+            <p:cNvPr id="43" name="標題 1">
+              <a:extLst>
+                <a:ext uri="{FF2B5EF4-FFF2-40B4-BE49-F238E27FC236}">
+                  <a16:creationId xmlns:a16="http://schemas.microsoft.com/office/drawing/2014/main" id="{132EA12F-7E87-4F6B-AB66-A49D55B37B65}"/>
+                </a:ext>
+              </a:extLst>
+            </p:cNvPr>
+            <p:cNvSpPr txBox="1">
+              <a:spLocks/>
+            </p:cNvSpPr>
+            <p:nvPr/>
+          </p:nvSpPr>
+          <p:spPr>
+            <a:xfrm>
+              <a:off x="2695951" y="8570792"/>
+              <a:ext cx="1657683" cy="739108"/>
+            </a:xfrm>
+            <a:prstGeom prst="rect">
+              <a:avLst/>
+            </a:prstGeom>
+          </p:spPr>
+          <p:txBody>
+            <a:bodyPr vert="horz" lIns="91440" tIns="45720" rIns="91440" bIns="45720" rtlCol="0" anchor="ctr">
+              <a:noAutofit/>
+            </a:bodyPr>
+            <a:lstStyle>
+              <a:lvl1pPr algn="l" defTabSz="1371600" rtl="0" eaLnBrk="1" latinLnBrk="0" hangingPunct="1">
+                <a:lnSpc>
+                  <a:spcPct val="90000"/>
+                </a:lnSpc>
+                <a:spcBef>
+                  <a:spcPct val="0"/>
+                </a:spcBef>
+                <a:buNone/>
+                <a:defRPr sz="6600" kern="1200">
+                  <a:solidFill>
+                    <a:schemeClr val="tx1"/>
+                  </a:solidFill>
+                  <a:latin typeface="+mj-lt"/>
+                  <a:ea typeface="+mj-ea"/>
+                  <a:cs typeface="+mj-cs"/>
+                </a:defRPr>
+              </a:lvl1pPr>
+            </a:lstStyle>
+            <a:p>
+              <a:pPr algn="ctr"/>
+              <a:r>
+                <a:rPr lang="zh-TW" altLang="en-US" sz="3200" b="1" dirty="0">
+                  <a:latin typeface="俐方體11號" pitchFamily="2" charset="-120"/>
+                  <a:ea typeface="俐方體11號" pitchFamily="2" charset="-120"/>
+                </a:rPr>
+                <a:t>我</a:t>
+              </a:r>
+            </a:p>
+          </p:txBody>
+        </p:sp>
+      </p:grpSp>
+    </p:spTree>
+    <p:extLst>
+      <p:ext uri="{BB962C8B-B14F-4D97-AF65-F5344CB8AC3E}">
+        <p14:creationId xmlns:p14="http://schemas.microsoft.com/office/powerpoint/2010/main" val="1775333137"/>
+      </p:ext>
+    </p:extLst>
+  </p:cSld>
+  <p:clrMapOvr>
+    <a:masterClrMapping/>
+  </p:clrMapOvr>
+  <mc:AlternateContent xmlns:mc="http://schemas.openxmlformats.org/markup-compatibility/2006" xmlns:p14="http://schemas.microsoft.com/office/powerpoint/2010/main">
+    <mc:Choice Requires="p14">
+      <p:transition spd="slow" p14:dur="2000">
+        <p:cut/>
+      </p:transition>
+    </mc:Choice>
+    <mc:Fallback xmlns="">
+      <p:transition spd="slow">
+        <p:cut/>
+      </p:transition>
+    </mc:Fallback>
+  </mc:AlternateContent>
+</p:sld>
+</file>
+
+<file path=ppt/slides/slide29.xml><?xml version="1.0" encoding="utf-8"?>
+<p:sld xmlns:a="http://schemas.openxmlformats.org/drawingml/2006/main" xmlns:r="http://schemas.openxmlformats.org/officeDocument/2006/relationships" xmlns:p="http://schemas.openxmlformats.org/presentationml/2006/main">
+  <p:cSld>
+    <p:spTree>
+      <p:nvGrpSpPr>
+        <p:cNvPr id="1" name=""/>
+        <p:cNvGrpSpPr/>
+        <p:nvPr/>
+      </p:nvGrpSpPr>
+      <p:grpSpPr>
+        <a:xfrm>
+          <a:off x="0" y="0"/>
+          <a:ext cx="0" cy="0"/>
+          <a:chOff x="0" y="0"/>
+          <a:chExt cx="0" cy="0"/>
+        </a:xfrm>
+      </p:grpSpPr>
+      <p:sp>
+        <p:nvSpPr>
+          <p:cNvPr id="4" name="矩形 3">
+            <a:extLst>
+              <a:ext uri="{FF2B5EF4-FFF2-40B4-BE49-F238E27FC236}">
+                <a16:creationId xmlns:a16="http://schemas.microsoft.com/office/drawing/2014/main" id="{9F2781C0-7915-4AC6-AF28-40B77C669121}"/>
+              </a:ext>
+            </a:extLst>
+          </p:cNvPr>
+          <p:cNvSpPr/>
+          <p:nvPr/>
+        </p:nvSpPr>
+        <p:spPr>
+          <a:xfrm>
+            <a:off x="2325189" y="814952"/>
+            <a:ext cx="15218228" cy="8752114"/>
+          </a:xfrm>
+          <a:prstGeom prst="rect">
+            <a:avLst/>
+          </a:prstGeom>
+          <a:noFill/>
+          <a:ln w="57150">
+            <a:solidFill>
+              <a:schemeClr val="tx1"/>
+            </a:solidFill>
+          </a:ln>
+        </p:spPr>
+        <p:style>
+          <a:lnRef idx="2">
+            <a:schemeClr val="accent1">
+              <a:shade val="50000"/>
+            </a:schemeClr>
+          </a:lnRef>
+          <a:fillRef idx="1">
+            <a:schemeClr val="accent1"/>
+          </a:fillRef>
+          <a:effectRef idx="0">
+            <a:schemeClr val="accent1"/>
+          </a:effectRef>
+          <a:fontRef idx="minor">
+            <a:schemeClr val="lt1"/>
+          </a:fontRef>
+        </p:style>
+        <p:txBody>
+          <a:bodyPr rtlCol="0" anchor="ctr"/>
+          <a:lstStyle/>
+          <a:p>
+            <a:pPr algn="ctr"/>
+            <a:endParaRPr lang="zh-TW" altLang="en-US" sz="5400" b="1"/>
+          </a:p>
+        </p:txBody>
+      </p:sp>
+      <p:sp>
+        <p:nvSpPr>
+          <p:cNvPr id="7" name="標題 1">
+            <a:extLst>
+              <a:ext uri="{FF2B5EF4-FFF2-40B4-BE49-F238E27FC236}">
+                <a16:creationId xmlns:a16="http://schemas.microsoft.com/office/drawing/2014/main" id="{C9D3FCC7-12DE-4AFA-84C8-E8BBD733315A}"/>
+              </a:ext>
+            </a:extLst>
+          </p:cNvPr>
+          <p:cNvSpPr txBox="1">
+            <a:spLocks/>
+          </p:cNvSpPr>
+          <p:nvPr/>
+        </p:nvSpPr>
+        <p:spPr>
+          <a:xfrm>
+            <a:off x="169818" y="627015"/>
+            <a:ext cx="2341369" cy="1084217"/>
+          </a:xfrm>
+          <a:prstGeom prst="rect">
+            <a:avLst/>
+          </a:prstGeom>
+        </p:spPr>
+        <p:txBody>
+          <a:bodyPr vert="horz" lIns="91440" tIns="45720" rIns="91440" bIns="45720" rtlCol="0" anchor="ctr">
+            <a:noAutofit/>
+          </a:bodyPr>
+          <a:lstStyle>
+            <a:lvl1pPr algn="l" defTabSz="1371600" rtl="0" eaLnBrk="1" latinLnBrk="0" hangingPunct="1">
+              <a:lnSpc>
+                <a:spcPct val="90000"/>
+              </a:lnSpc>
+              <a:spcBef>
+                <a:spcPct val="0"/>
+              </a:spcBef>
+              <a:buNone/>
+              <a:defRPr sz="6600" kern="1200">
+                <a:solidFill>
+                  <a:schemeClr val="tx1"/>
+                </a:solidFill>
+                <a:latin typeface="+mj-lt"/>
+                <a:ea typeface="+mj-ea"/>
+                <a:cs typeface="+mj-cs"/>
+              </a:defRPr>
+            </a:lvl1pPr>
+          </a:lstStyle>
+          <a:p>
+            <a:r>
+              <a:rPr lang="zh-TW" altLang="en-US" sz="4800" b="1" dirty="0">
+                <a:latin typeface="俐方體11號" pitchFamily="2" charset="-120"/>
+                <a:ea typeface="俐方體11號" pitchFamily="2" charset="-120"/>
+              </a:rPr>
+              <a:t>第二章</a:t>
+            </a:r>
+          </a:p>
+        </p:txBody>
+      </p:sp>
+      <p:sp>
+        <p:nvSpPr>
+          <p:cNvPr id="9" name="標題 1">
+            <a:extLst>
+              <a:ext uri="{FF2B5EF4-FFF2-40B4-BE49-F238E27FC236}">
+                <a16:creationId xmlns:a16="http://schemas.microsoft.com/office/drawing/2014/main" id="{93F2EB4E-2897-4D6A-9E1E-7A0E0A978B59}"/>
+              </a:ext>
+            </a:extLst>
+          </p:cNvPr>
+          <p:cNvSpPr txBox="1">
+            <a:spLocks/>
+          </p:cNvSpPr>
+          <p:nvPr/>
+        </p:nvSpPr>
+        <p:spPr>
+          <a:xfrm>
+            <a:off x="4093824" y="8639031"/>
+            <a:ext cx="1192034" cy="739109"/>
+          </a:xfrm>
+          <a:prstGeom prst="rect">
+            <a:avLst/>
+          </a:prstGeom>
+        </p:spPr>
+        <p:txBody>
+          <a:bodyPr vert="horz" lIns="91440" tIns="45720" rIns="91440" bIns="45720" rtlCol="0" anchor="ctr">
+            <a:noAutofit/>
+          </a:bodyPr>
+          <a:lstStyle>
+            <a:lvl1pPr algn="l" defTabSz="1371600" rtl="0" eaLnBrk="1" latinLnBrk="0" hangingPunct="1">
+              <a:lnSpc>
+                <a:spcPct val="90000"/>
+              </a:lnSpc>
+              <a:spcBef>
+                <a:spcPct val="0"/>
+              </a:spcBef>
+              <a:buNone/>
+              <a:defRPr sz="6600" kern="1200">
+                <a:solidFill>
+                  <a:schemeClr val="tx1"/>
+                </a:solidFill>
+                <a:latin typeface="+mj-lt"/>
+                <a:ea typeface="+mj-ea"/>
+                <a:cs typeface="+mj-cs"/>
+              </a:defRPr>
+            </a:lvl1pPr>
+          </a:lstStyle>
+          <a:p>
+            <a:pPr algn="ctr"/>
+            <a:r>
+              <a:rPr lang="en-US" altLang="zh-TW" sz="4800" b="1" dirty="0">
+                <a:latin typeface="俐方體11號" pitchFamily="2" charset="-120"/>
+                <a:ea typeface="俐方體11號" pitchFamily="2" charset="-120"/>
+              </a:rPr>
+              <a:t>+</a:t>
+            </a:r>
+            <a:endParaRPr lang="zh-TW" altLang="en-US" sz="4800" b="1" dirty="0">
+              <a:latin typeface="俐方體11號" pitchFamily="2" charset="-120"/>
+              <a:ea typeface="俐方體11號" pitchFamily="2" charset="-120"/>
+            </a:endParaRPr>
+          </a:p>
+        </p:txBody>
+      </p:sp>
+      <p:sp>
+        <p:nvSpPr>
+          <p:cNvPr id="10" name="標題 1">
+            <a:extLst>
+              <a:ext uri="{FF2B5EF4-FFF2-40B4-BE49-F238E27FC236}">
+                <a16:creationId xmlns:a16="http://schemas.microsoft.com/office/drawing/2014/main" id="{019C3D15-ADF9-485C-AAAC-C4A5ECED5235}"/>
+              </a:ext>
+            </a:extLst>
+          </p:cNvPr>
+          <p:cNvSpPr txBox="1">
+            <a:spLocks/>
+          </p:cNvSpPr>
+          <p:nvPr/>
+        </p:nvSpPr>
+        <p:spPr>
+          <a:xfrm>
+            <a:off x="6423919" y="8639031"/>
+            <a:ext cx="1192034" cy="739109"/>
+          </a:xfrm>
+          <a:prstGeom prst="rect">
+            <a:avLst/>
+          </a:prstGeom>
+        </p:spPr>
+        <p:txBody>
+          <a:bodyPr vert="horz" lIns="91440" tIns="45720" rIns="91440" bIns="45720" rtlCol="0" anchor="ctr">
+            <a:noAutofit/>
+          </a:bodyPr>
+          <a:lstStyle>
+            <a:lvl1pPr algn="l" defTabSz="1371600" rtl="0" eaLnBrk="1" latinLnBrk="0" hangingPunct="1">
+              <a:lnSpc>
+                <a:spcPct val="90000"/>
+              </a:lnSpc>
+              <a:spcBef>
+                <a:spcPct val="0"/>
+              </a:spcBef>
+              <a:buNone/>
+              <a:defRPr sz="6600" kern="1200">
+                <a:solidFill>
+                  <a:schemeClr val="tx1"/>
+                </a:solidFill>
+                <a:latin typeface="+mj-lt"/>
+                <a:ea typeface="+mj-ea"/>
+                <a:cs typeface="+mj-cs"/>
+              </a:defRPr>
+            </a:lvl1pPr>
+          </a:lstStyle>
+          <a:p>
+            <a:pPr algn="ctr"/>
+            <a:r>
+              <a:rPr lang="en-US" altLang="zh-TW" sz="4800" b="1" dirty="0">
+                <a:latin typeface="俐方體11號" pitchFamily="2" charset="-120"/>
+                <a:ea typeface="俐方體11號" pitchFamily="2" charset="-120"/>
+              </a:rPr>
+              <a:t>+</a:t>
+            </a:r>
+            <a:endParaRPr lang="zh-TW" altLang="en-US" sz="4800" b="1" dirty="0">
+              <a:latin typeface="俐方體11號" pitchFamily="2" charset="-120"/>
+              <a:ea typeface="俐方體11號" pitchFamily="2" charset="-120"/>
+            </a:endParaRPr>
+          </a:p>
+        </p:txBody>
+      </p:sp>
+      <p:sp>
+        <p:nvSpPr>
+          <p:cNvPr id="16" name="矩形 15">
+            <a:extLst>
+              <a:ext uri="{FF2B5EF4-FFF2-40B4-BE49-F238E27FC236}">
+                <a16:creationId xmlns:a16="http://schemas.microsoft.com/office/drawing/2014/main" id="{00FB009A-5FD5-4647-9E1A-13D19CE6D97B}"/>
+              </a:ext>
+            </a:extLst>
+          </p:cNvPr>
+          <p:cNvSpPr/>
+          <p:nvPr/>
+        </p:nvSpPr>
+        <p:spPr>
+          <a:xfrm>
+            <a:off x="12648135" y="1184898"/>
+            <a:ext cx="4516368" cy="7144502"/>
+          </a:xfrm>
+          <a:prstGeom prst="rect">
+            <a:avLst/>
+          </a:prstGeom>
+          <a:noFill/>
+          <a:ln w="57150">
+            <a:solidFill>
+              <a:schemeClr val="tx1"/>
+            </a:solidFill>
+          </a:ln>
+        </p:spPr>
+        <p:style>
+          <a:lnRef idx="2">
+            <a:schemeClr val="accent1">
+              <a:shade val="50000"/>
+            </a:schemeClr>
+          </a:lnRef>
+          <a:fillRef idx="1">
+            <a:schemeClr val="accent1"/>
+          </a:fillRef>
+          <a:effectRef idx="0">
+            <a:schemeClr val="accent1"/>
+          </a:effectRef>
+          <a:fontRef idx="minor">
+            <a:schemeClr val="lt1"/>
+          </a:fontRef>
+        </p:style>
+        <p:txBody>
+          <a:bodyPr rtlCol="0" anchor="ctr"/>
+          <a:lstStyle/>
+          <a:p>
+            <a:pPr algn="ctr"/>
+            <a:endParaRPr lang="zh-TW" altLang="en-US" sz="5400" b="1"/>
+          </a:p>
+        </p:txBody>
+      </p:sp>
+      <p:sp>
+        <p:nvSpPr>
+          <p:cNvPr id="20" name="矩形 19">
+            <a:extLst>
+              <a:ext uri="{FF2B5EF4-FFF2-40B4-BE49-F238E27FC236}">
+                <a16:creationId xmlns:a16="http://schemas.microsoft.com/office/drawing/2014/main" id="{26415D62-9E47-430A-A990-B02A60C6C5BD}"/>
+              </a:ext>
+            </a:extLst>
+          </p:cNvPr>
+          <p:cNvSpPr/>
+          <p:nvPr/>
+        </p:nvSpPr>
+        <p:spPr>
+          <a:xfrm>
+            <a:off x="2695952" y="1169123"/>
+            <a:ext cx="9573267" cy="7144502"/>
+          </a:xfrm>
+          <a:prstGeom prst="rect">
+            <a:avLst/>
+          </a:prstGeom>
+          <a:noFill/>
+          <a:ln w="57150">
+            <a:solidFill>
+              <a:schemeClr val="tx1"/>
+            </a:solidFill>
+          </a:ln>
+        </p:spPr>
+        <p:style>
+          <a:lnRef idx="2">
+            <a:schemeClr val="accent1">
+              <a:shade val="50000"/>
+            </a:schemeClr>
+          </a:lnRef>
+          <a:fillRef idx="1">
+            <a:schemeClr val="accent1"/>
+          </a:fillRef>
+          <a:effectRef idx="0">
+            <a:schemeClr val="accent1"/>
+          </a:effectRef>
+          <a:fontRef idx="minor">
+            <a:schemeClr val="lt1"/>
+          </a:fontRef>
+        </p:style>
+        <p:txBody>
+          <a:bodyPr rtlCol="0" anchor="ctr"/>
+          <a:lstStyle/>
+          <a:p>
+            <a:pPr algn="ctr"/>
+            <a:endParaRPr lang="zh-TW" altLang="en-US" sz="5400" b="1"/>
+          </a:p>
+        </p:txBody>
+      </p:sp>
+      <p:grpSp>
+        <p:nvGrpSpPr>
+          <p:cNvPr id="3" name="群組 2">
+            <a:extLst>
+              <a:ext uri="{FF2B5EF4-FFF2-40B4-BE49-F238E27FC236}">
+                <a16:creationId xmlns:a16="http://schemas.microsoft.com/office/drawing/2014/main" id="{6B0ECF5A-0ACB-440E-B2CC-F68B49806925}"/>
+              </a:ext>
+            </a:extLst>
+          </p:cNvPr>
+          <p:cNvGrpSpPr/>
+          <p:nvPr/>
+        </p:nvGrpSpPr>
+        <p:grpSpPr>
+          <a:xfrm>
+            <a:off x="5026046" y="8570791"/>
+            <a:ext cx="1657685" cy="739109"/>
+            <a:chOff x="5754012" y="8570791"/>
+            <a:chExt cx="1657685" cy="739109"/>
+          </a:xfrm>
+        </p:grpSpPr>
+        <p:sp>
+          <p:nvSpPr>
+            <p:cNvPr id="6" name="矩形 5">
+              <a:extLst>
+                <a:ext uri="{FF2B5EF4-FFF2-40B4-BE49-F238E27FC236}">
+                  <a16:creationId xmlns:a16="http://schemas.microsoft.com/office/drawing/2014/main" id="{21548674-DAA4-464A-A6B3-04DBA2435B11}"/>
+                </a:ext>
+              </a:extLst>
+            </p:cNvPr>
+            <p:cNvSpPr/>
+            <p:nvPr/>
+          </p:nvSpPr>
+          <p:spPr>
+            <a:xfrm>
+              <a:off x="5754014" y="8570791"/>
+              <a:ext cx="1657683" cy="739109"/>
+            </a:xfrm>
+            <a:prstGeom prst="rect">
+              <a:avLst/>
+            </a:prstGeom>
+            <a:noFill/>
+            <a:ln w="57150">
+              <a:solidFill>
+                <a:schemeClr val="tx1"/>
+              </a:solidFill>
+            </a:ln>
+          </p:spPr>
+          <p:style>
+            <a:lnRef idx="2">
+              <a:schemeClr val="accent1">
+                <a:shade val="50000"/>
+              </a:schemeClr>
+            </a:lnRef>
+            <a:fillRef idx="1">
+              <a:schemeClr val="accent1"/>
+            </a:fillRef>
+            <a:effectRef idx="0">
+              <a:schemeClr val="accent1"/>
+            </a:effectRef>
+            <a:fontRef idx="minor">
+              <a:schemeClr val="lt1"/>
+            </a:fontRef>
+          </p:style>
+          <p:txBody>
+            <a:bodyPr rtlCol="0" anchor="ctr"/>
+            <a:lstStyle/>
+            <a:p>
+              <a:pPr algn="ctr"/>
+              <a:endParaRPr lang="zh-TW" altLang="en-US" sz="5400" b="1"/>
+            </a:p>
+          </p:txBody>
+        </p:sp>
+        <p:sp>
+          <p:nvSpPr>
+            <p:cNvPr id="21" name="標題 1">
+              <a:extLst>
+                <a:ext uri="{FF2B5EF4-FFF2-40B4-BE49-F238E27FC236}">
+                  <a16:creationId xmlns:a16="http://schemas.microsoft.com/office/drawing/2014/main" id="{67A03AC2-9723-4155-A792-2A87FBEE759F}"/>
+                </a:ext>
+              </a:extLst>
+            </p:cNvPr>
+            <p:cNvSpPr txBox="1">
+              <a:spLocks/>
+            </p:cNvSpPr>
+            <p:nvPr/>
+          </p:nvSpPr>
+          <p:spPr>
+            <a:xfrm>
+              <a:off x="5754012" y="8570791"/>
+              <a:ext cx="1657683" cy="739109"/>
+            </a:xfrm>
+            <a:prstGeom prst="rect">
+              <a:avLst/>
+            </a:prstGeom>
+          </p:spPr>
+          <p:txBody>
+            <a:bodyPr vert="horz" lIns="91440" tIns="45720" rIns="91440" bIns="45720" rtlCol="0" anchor="ctr">
+              <a:noAutofit/>
+            </a:bodyPr>
+            <a:lstStyle>
+              <a:lvl1pPr algn="l" defTabSz="1371600" rtl="0" eaLnBrk="1" latinLnBrk="0" hangingPunct="1">
+                <a:lnSpc>
+                  <a:spcPct val="90000"/>
+                </a:lnSpc>
+                <a:spcBef>
+                  <a:spcPct val="0"/>
+                </a:spcBef>
+                <a:buNone/>
+                <a:defRPr sz="6600" kern="1200">
+                  <a:solidFill>
+                    <a:schemeClr val="tx1"/>
+                  </a:solidFill>
+                  <a:latin typeface="+mj-lt"/>
+                  <a:ea typeface="+mj-ea"/>
+                  <a:cs typeface="+mj-cs"/>
+                </a:defRPr>
+              </a:lvl1pPr>
+            </a:lstStyle>
+            <a:p>
+              <a:pPr algn="ctr"/>
+              <a:endParaRPr lang="zh-TW" altLang="en-US" sz="3200" b="1" dirty="0">
+                <a:solidFill>
+                  <a:schemeClr val="accent1"/>
+                </a:solidFill>
+                <a:latin typeface="俐方體11號" pitchFamily="2" charset="-120"/>
+                <a:ea typeface="俐方體11號" pitchFamily="2" charset="-120"/>
+              </a:endParaRPr>
+            </a:p>
+          </p:txBody>
+        </p:sp>
+      </p:grpSp>
+      <p:grpSp>
+        <p:nvGrpSpPr>
+          <p:cNvPr id="2" name="群組 1">
+            <a:extLst>
+              <a:ext uri="{FF2B5EF4-FFF2-40B4-BE49-F238E27FC236}">
+                <a16:creationId xmlns:a16="http://schemas.microsoft.com/office/drawing/2014/main" id="{695751D0-9F19-45ED-8101-47473E826498}"/>
+              </a:ext>
+            </a:extLst>
+          </p:cNvPr>
+          <p:cNvGrpSpPr/>
+          <p:nvPr/>
+        </p:nvGrpSpPr>
+        <p:grpSpPr>
+          <a:xfrm>
+            <a:off x="7356143" y="8586565"/>
+            <a:ext cx="4913076" cy="748467"/>
+            <a:chOff x="8812075" y="8561434"/>
+            <a:chExt cx="4238380" cy="748467"/>
+          </a:xfrm>
+        </p:grpSpPr>
+        <p:sp>
+          <p:nvSpPr>
+            <p:cNvPr id="8" name="矩形 7">
+              <a:extLst>
+                <a:ext uri="{FF2B5EF4-FFF2-40B4-BE49-F238E27FC236}">
+                  <a16:creationId xmlns:a16="http://schemas.microsoft.com/office/drawing/2014/main" id="{779ED99C-FC51-414B-9221-DBEFB509DFC8}"/>
+                </a:ext>
+              </a:extLst>
+            </p:cNvPr>
+            <p:cNvSpPr/>
+            <p:nvPr/>
+          </p:nvSpPr>
+          <p:spPr>
+            <a:xfrm>
+              <a:off x="8812077" y="8570791"/>
+              <a:ext cx="4238378" cy="739109"/>
+            </a:xfrm>
+            <a:prstGeom prst="rect">
+              <a:avLst/>
+            </a:prstGeom>
+            <a:noFill/>
+            <a:ln w="57150">
+              <a:solidFill>
+                <a:schemeClr val="tx1"/>
+              </a:solidFill>
+            </a:ln>
+          </p:spPr>
+          <p:style>
+            <a:lnRef idx="2">
+              <a:schemeClr val="accent1">
+                <a:shade val="50000"/>
+              </a:schemeClr>
+            </a:lnRef>
+            <a:fillRef idx="1">
+              <a:schemeClr val="accent1"/>
+            </a:fillRef>
+            <a:effectRef idx="0">
+              <a:schemeClr val="accent1"/>
+            </a:effectRef>
+            <a:fontRef idx="minor">
+              <a:schemeClr val="lt1"/>
+            </a:fontRef>
+          </p:style>
+          <p:txBody>
+            <a:bodyPr rtlCol="0" anchor="ctr"/>
+            <a:lstStyle/>
+            <a:p>
+              <a:pPr algn="ctr"/>
+              <a:endParaRPr lang="zh-TW" altLang="en-US" sz="5400" b="1"/>
+            </a:p>
+          </p:txBody>
+        </p:sp>
+        <p:sp>
+          <p:nvSpPr>
+            <p:cNvPr id="22" name="標題 1">
+              <a:extLst>
+                <a:ext uri="{FF2B5EF4-FFF2-40B4-BE49-F238E27FC236}">
+                  <a16:creationId xmlns:a16="http://schemas.microsoft.com/office/drawing/2014/main" id="{2AACBDE3-A905-4D12-9712-4DF24D9391FE}"/>
+                </a:ext>
+              </a:extLst>
+            </p:cNvPr>
+            <p:cNvSpPr txBox="1">
+              <a:spLocks/>
+            </p:cNvSpPr>
+            <p:nvPr/>
+          </p:nvSpPr>
+          <p:spPr>
+            <a:xfrm>
+              <a:off x="8812075" y="8561434"/>
+              <a:ext cx="4238378" cy="748467"/>
+            </a:xfrm>
+            <a:prstGeom prst="rect">
+              <a:avLst/>
+            </a:prstGeom>
+          </p:spPr>
+          <p:txBody>
+            <a:bodyPr vert="horz" lIns="91440" tIns="45720" rIns="91440" bIns="45720" rtlCol="0" anchor="ctr">
+              <a:noAutofit/>
+            </a:bodyPr>
+            <a:lstStyle>
+              <a:lvl1pPr algn="l" defTabSz="1371600" rtl="0" eaLnBrk="1" latinLnBrk="0" hangingPunct="1">
+                <a:lnSpc>
+                  <a:spcPct val="90000"/>
+                </a:lnSpc>
+                <a:spcBef>
+                  <a:spcPct val="0"/>
+                </a:spcBef>
+                <a:buNone/>
+                <a:defRPr sz="6600" kern="1200">
+                  <a:solidFill>
+                    <a:schemeClr val="tx1"/>
+                  </a:solidFill>
+                  <a:latin typeface="+mj-lt"/>
+                  <a:ea typeface="+mj-ea"/>
+                  <a:cs typeface="+mj-cs"/>
+                </a:defRPr>
+              </a:lvl1pPr>
+            </a:lstStyle>
+            <a:p>
+              <a:pPr algn="ctr"/>
+              <a:endParaRPr lang="zh-TW" altLang="en-US" sz="3200" b="1" dirty="0">
+                <a:solidFill>
+                  <a:schemeClr val="accent2"/>
+                </a:solidFill>
+                <a:latin typeface="俐方體11號" pitchFamily="2" charset="-120"/>
+                <a:ea typeface="俐方體11號" pitchFamily="2" charset="-120"/>
+              </a:endParaRPr>
+            </a:p>
+          </p:txBody>
+        </p:sp>
+      </p:grpSp>
+      <p:grpSp>
+        <p:nvGrpSpPr>
+          <p:cNvPr id="26" name="群組 25">
+            <a:extLst>
+              <a:ext uri="{FF2B5EF4-FFF2-40B4-BE49-F238E27FC236}">
+                <a16:creationId xmlns:a16="http://schemas.microsoft.com/office/drawing/2014/main" id="{7A285265-E7A4-44B3-9CE5-5D261921C5C0}"/>
+              </a:ext>
+            </a:extLst>
+          </p:cNvPr>
+          <p:cNvGrpSpPr/>
+          <p:nvPr/>
+        </p:nvGrpSpPr>
+        <p:grpSpPr>
+          <a:xfrm>
+            <a:off x="2695951" y="8570791"/>
+            <a:ext cx="1657685" cy="739109"/>
+            <a:chOff x="2695951" y="8570791"/>
+            <a:chExt cx="1657685" cy="739109"/>
+          </a:xfrm>
+        </p:grpSpPr>
+        <p:sp>
+          <p:nvSpPr>
+            <p:cNvPr id="5" name="矩形 4">
+              <a:extLst>
+                <a:ext uri="{FF2B5EF4-FFF2-40B4-BE49-F238E27FC236}">
+                  <a16:creationId xmlns:a16="http://schemas.microsoft.com/office/drawing/2014/main" id="{928EDFF2-62EE-436F-9AF0-E6ABF8E097DC}"/>
+                </a:ext>
+              </a:extLst>
+            </p:cNvPr>
+            <p:cNvSpPr/>
+            <p:nvPr/>
+          </p:nvSpPr>
+          <p:spPr>
+            <a:xfrm>
+              <a:off x="2695953" y="8570791"/>
+              <a:ext cx="1657683" cy="739109"/>
+            </a:xfrm>
+            <a:prstGeom prst="rect">
+              <a:avLst/>
+            </a:prstGeom>
+            <a:noFill/>
+            <a:ln w="57150">
+              <a:solidFill>
+                <a:schemeClr val="tx1"/>
+              </a:solidFill>
+            </a:ln>
+          </p:spPr>
+          <p:style>
+            <a:lnRef idx="2">
+              <a:schemeClr val="accent1">
+                <a:shade val="50000"/>
+              </a:schemeClr>
+            </a:lnRef>
+            <a:fillRef idx="1">
+              <a:schemeClr val="accent1"/>
+            </a:fillRef>
+            <a:effectRef idx="0">
+              <a:schemeClr val="accent1"/>
+            </a:effectRef>
+            <a:fontRef idx="minor">
+              <a:schemeClr val="lt1"/>
+            </a:fontRef>
+          </p:style>
+          <p:txBody>
+            <a:bodyPr rtlCol="0" anchor="ctr"/>
+            <a:lstStyle/>
+            <a:p>
+              <a:pPr algn="ctr"/>
+              <a:endParaRPr lang="zh-TW" altLang="en-US" sz="5400" b="1"/>
+            </a:p>
+          </p:txBody>
+        </p:sp>
+        <p:sp>
+          <p:nvSpPr>
+            <p:cNvPr id="23" name="標題 1">
+              <a:extLst>
+                <a:ext uri="{FF2B5EF4-FFF2-40B4-BE49-F238E27FC236}">
+                  <a16:creationId xmlns:a16="http://schemas.microsoft.com/office/drawing/2014/main" id="{29E18C5E-E04E-4B65-BA57-40FD1A63BF28}"/>
+                </a:ext>
+              </a:extLst>
+            </p:cNvPr>
+            <p:cNvSpPr txBox="1">
+              <a:spLocks/>
+            </p:cNvSpPr>
+            <p:nvPr/>
+          </p:nvSpPr>
+          <p:spPr>
+            <a:xfrm>
+              <a:off x="2695951" y="8570792"/>
+              <a:ext cx="1657683" cy="739108"/>
+            </a:xfrm>
+            <a:prstGeom prst="rect">
+              <a:avLst/>
+            </a:prstGeom>
+          </p:spPr>
+          <p:txBody>
+            <a:bodyPr vert="horz" lIns="91440" tIns="45720" rIns="91440" bIns="45720" rtlCol="0" anchor="ctr">
+              <a:noAutofit/>
+            </a:bodyPr>
+            <a:lstStyle>
+              <a:lvl1pPr algn="l" defTabSz="1371600" rtl="0" eaLnBrk="1" latinLnBrk="0" hangingPunct="1">
+                <a:lnSpc>
+                  <a:spcPct val="90000"/>
+                </a:lnSpc>
+                <a:spcBef>
+                  <a:spcPct val="0"/>
+                </a:spcBef>
+                <a:buNone/>
+                <a:defRPr sz="6600" kern="1200">
+                  <a:solidFill>
+                    <a:schemeClr val="tx1"/>
+                  </a:solidFill>
+                  <a:latin typeface="+mj-lt"/>
+                  <a:ea typeface="+mj-ea"/>
+                  <a:cs typeface="+mj-cs"/>
+                </a:defRPr>
+              </a:lvl1pPr>
+            </a:lstStyle>
+            <a:p>
+              <a:pPr algn="ctr"/>
+              <a:endParaRPr lang="zh-TW" altLang="en-US" sz="3200" b="1" dirty="0">
+                <a:latin typeface="俐方體11號" pitchFamily="2" charset="-120"/>
+                <a:ea typeface="俐方體11號" pitchFamily="2" charset="-120"/>
+              </a:endParaRPr>
+            </a:p>
+          </p:txBody>
+        </p:sp>
+      </p:grpSp>
+      <p:grpSp>
+        <p:nvGrpSpPr>
+          <p:cNvPr id="27" name="群組 26">
+            <a:extLst>
+              <a:ext uri="{FF2B5EF4-FFF2-40B4-BE49-F238E27FC236}">
+                <a16:creationId xmlns:a16="http://schemas.microsoft.com/office/drawing/2014/main" id="{37E2F93F-F4D8-4420-9681-941A15CE0A0D}"/>
+              </a:ext>
+            </a:extLst>
+          </p:cNvPr>
+          <p:cNvGrpSpPr/>
+          <p:nvPr/>
+        </p:nvGrpSpPr>
+        <p:grpSpPr>
+          <a:xfrm>
+            <a:off x="12648136" y="8570791"/>
+            <a:ext cx="2068582" cy="754884"/>
+            <a:chOff x="13492407" y="8570791"/>
+            <a:chExt cx="1657685" cy="754884"/>
+          </a:xfrm>
+        </p:grpSpPr>
+        <p:sp>
+          <p:nvSpPr>
+            <p:cNvPr id="11" name="矩形 10">
+              <a:extLst>
+                <a:ext uri="{FF2B5EF4-FFF2-40B4-BE49-F238E27FC236}">
+                  <a16:creationId xmlns:a16="http://schemas.microsoft.com/office/drawing/2014/main" id="{EEDDACBE-F216-46A4-B89F-0E3C1C4A195A}"/>
+                </a:ext>
+              </a:extLst>
+            </p:cNvPr>
+            <p:cNvSpPr/>
+            <p:nvPr/>
+          </p:nvSpPr>
+          <p:spPr>
+            <a:xfrm>
+              <a:off x="13492409" y="8570791"/>
+              <a:ext cx="1657683" cy="739109"/>
+            </a:xfrm>
+            <a:prstGeom prst="rect">
+              <a:avLst/>
+            </a:prstGeom>
+            <a:solidFill>
+              <a:schemeClr val="accent6"/>
+            </a:solidFill>
+            <a:ln w="57150">
+              <a:solidFill>
+                <a:schemeClr val="tx1"/>
+              </a:solidFill>
+            </a:ln>
+          </p:spPr>
+          <p:style>
+            <a:lnRef idx="2">
+              <a:schemeClr val="accent1">
+                <a:shade val="50000"/>
+              </a:schemeClr>
+            </a:lnRef>
+            <a:fillRef idx="1">
+              <a:schemeClr val="accent1"/>
+            </a:fillRef>
+            <a:effectRef idx="0">
+              <a:schemeClr val="accent1"/>
+            </a:effectRef>
+            <a:fontRef idx="minor">
+              <a:schemeClr val="lt1"/>
+            </a:fontRef>
+          </p:style>
+          <p:txBody>
+            <a:bodyPr rtlCol="0" anchor="ctr"/>
+            <a:lstStyle/>
+            <a:p>
+              <a:pPr algn="ctr"/>
+              <a:endParaRPr lang="zh-TW" altLang="en-US" sz="5400" b="1">
+                <a:solidFill>
+                  <a:schemeClr val="accent6"/>
+                </a:solidFill>
+              </a:endParaRPr>
+            </a:p>
+          </p:txBody>
+        </p:sp>
+        <p:sp>
+          <p:nvSpPr>
+            <p:cNvPr id="24" name="標題 1">
+              <a:extLst>
+                <a:ext uri="{FF2B5EF4-FFF2-40B4-BE49-F238E27FC236}">
+                  <a16:creationId xmlns:a16="http://schemas.microsoft.com/office/drawing/2014/main" id="{2C760EE5-0536-47C2-AD2D-288B98DB4C04}"/>
+                </a:ext>
+              </a:extLst>
+            </p:cNvPr>
+            <p:cNvSpPr txBox="1">
+              <a:spLocks/>
+            </p:cNvSpPr>
+            <p:nvPr/>
+          </p:nvSpPr>
+          <p:spPr>
+            <a:xfrm>
+              <a:off x="13492407" y="8586565"/>
+              <a:ext cx="1657683" cy="739110"/>
+            </a:xfrm>
+            <a:prstGeom prst="rect">
+              <a:avLst/>
+            </a:prstGeom>
+          </p:spPr>
+          <p:txBody>
+            <a:bodyPr vert="horz" lIns="91440" tIns="45720" rIns="91440" bIns="45720" rtlCol="0" anchor="ctr">
+              <a:noAutofit/>
+            </a:bodyPr>
+            <a:lstStyle>
+              <a:lvl1pPr algn="l" defTabSz="1371600" rtl="0" eaLnBrk="1" latinLnBrk="0" hangingPunct="1">
+                <a:lnSpc>
+                  <a:spcPct val="90000"/>
+                </a:lnSpc>
+                <a:spcBef>
+                  <a:spcPct val="0"/>
+                </a:spcBef>
+                <a:buNone/>
+                <a:defRPr sz="6600" kern="1200">
+                  <a:solidFill>
+                    <a:schemeClr val="tx1"/>
+                  </a:solidFill>
+                  <a:latin typeface="+mj-lt"/>
+                  <a:ea typeface="+mj-ea"/>
+                  <a:cs typeface="+mj-cs"/>
+                </a:defRPr>
+              </a:lvl1pPr>
+            </a:lstStyle>
+            <a:p>
+              <a:pPr algn="ctr"/>
+              <a:endParaRPr lang="zh-TW" altLang="en-US" sz="3200" b="1" dirty="0">
+                <a:solidFill>
+                  <a:schemeClr val="bg1"/>
+                </a:solidFill>
+                <a:latin typeface="俐方體11號" pitchFamily="2" charset="-120"/>
+                <a:ea typeface="俐方體11號" pitchFamily="2" charset="-120"/>
+              </a:endParaRPr>
+            </a:p>
+          </p:txBody>
+        </p:sp>
+      </p:grpSp>
+      <p:grpSp>
+        <p:nvGrpSpPr>
+          <p:cNvPr id="28" name="群組 27">
+            <a:extLst>
+              <a:ext uri="{FF2B5EF4-FFF2-40B4-BE49-F238E27FC236}">
+                <a16:creationId xmlns:a16="http://schemas.microsoft.com/office/drawing/2014/main" id="{49D97BAD-26BE-4476-AAB1-E86360ECF72F}"/>
+              </a:ext>
+            </a:extLst>
+          </p:cNvPr>
+          <p:cNvGrpSpPr/>
+          <p:nvPr/>
+        </p:nvGrpSpPr>
+        <p:grpSpPr>
+          <a:xfrm>
+            <a:off x="15095634" y="8570791"/>
+            <a:ext cx="2068870" cy="739109"/>
+            <a:chOff x="15592046" y="8570791"/>
+            <a:chExt cx="1657684" cy="739109"/>
+          </a:xfrm>
+        </p:grpSpPr>
+        <p:sp>
+          <p:nvSpPr>
+            <p:cNvPr id="12" name="矩形 11">
+              <a:extLst>
+                <a:ext uri="{FF2B5EF4-FFF2-40B4-BE49-F238E27FC236}">
+                  <a16:creationId xmlns:a16="http://schemas.microsoft.com/office/drawing/2014/main" id="{EA176B58-5CEB-4853-BE39-967D6989DC5D}"/>
+                </a:ext>
+              </a:extLst>
+            </p:cNvPr>
+            <p:cNvSpPr/>
+            <p:nvPr/>
+          </p:nvSpPr>
+          <p:spPr>
+            <a:xfrm>
+              <a:off x="15592047" y="8570791"/>
+              <a:ext cx="1657683" cy="739109"/>
+            </a:xfrm>
+            <a:prstGeom prst="rect">
+              <a:avLst/>
+            </a:prstGeom>
+            <a:solidFill>
+              <a:srgbClr val="FF0000"/>
+            </a:solidFill>
+            <a:ln w="57150">
+              <a:solidFill>
+                <a:schemeClr val="tx1"/>
+              </a:solidFill>
+            </a:ln>
+          </p:spPr>
+          <p:style>
+            <a:lnRef idx="2">
+              <a:schemeClr val="accent1">
+                <a:shade val="50000"/>
+              </a:schemeClr>
+            </a:lnRef>
+            <a:fillRef idx="1">
+              <a:schemeClr val="accent1"/>
+            </a:fillRef>
+            <a:effectRef idx="0">
+              <a:schemeClr val="accent1"/>
+            </a:effectRef>
+            <a:fontRef idx="minor">
+              <a:schemeClr val="lt1"/>
+            </a:fontRef>
+          </p:style>
+          <p:txBody>
+            <a:bodyPr rtlCol="0" anchor="ctr"/>
+            <a:lstStyle/>
+            <a:p>
+              <a:pPr algn="ctr"/>
+              <a:endParaRPr lang="zh-TW" altLang="en-US" sz="5400" b="1"/>
+            </a:p>
+          </p:txBody>
+        </p:sp>
+        <p:sp>
+          <p:nvSpPr>
+            <p:cNvPr id="25" name="標題 1">
+              <a:extLst>
+                <a:ext uri="{FF2B5EF4-FFF2-40B4-BE49-F238E27FC236}">
+                  <a16:creationId xmlns:a16="http://schemas.microsoft.com/office/drawing/2014/main" id="{00B56794-98F3-4820-9ED2-0AE46E2A955D}"/>
+                </a:ext>
+              </a:extLst>
+            </p:cNvPr>
+            <p:cNvSpPr txBox="1">
+              <a:spLocks/>
+            </p:cNvSpPr>
+            <p:nvPr/>
+          </p:nvSpPr>
+          <p:spPr>
+            <a:xfrm>
+              <a:off x="15592046" y="8570791"/>
+              <a:ext cx="1657682" cy="739109"/>
+            </a:xfrm>
+            <a:prstGeom prst="rect">
+              <a:avLst/>
+            </a:prstGeom>
+          </p:spPr>
+          <p:txBody>
+            <a:bodyPr vert="horz" lIns="91440" tIns="45720" rIns="91440" bIns="45720" rtlCol="0" anchor="ctr">
+              <a:noAutofit/>
+            </a:bodyPr>
+            <a:lstStyle>
+              <a:lvl1pPr algn="l" defTabSz="1371600" rtl="0" eaLnBrk="1" latinLnBrk="0" hangingPunct="1">
+                <a:lnSpc>
+                  <a:spcPct val="90000"/>
+                </a:lnSpc>
+                <a:spcBef>
+                  <a:spcPct val="0"/>
+                </a:spcBef>
+                <a:buNone/>
+                <a:defRPr sz="6600" kern="1200">
+                  <a:solidFill>
+                    <a:schemeClr val="tx1"/>
+                  </a:solidFill>
+                  <a:latin typeface="+mj-lt"/>
+                  <a:ea typeface="+mj-ea"/>
+                  <a:cs typeface="+mj-cs"/>
+                </a:defRPr>
+              </a:lvl1pPr>
+            </a:lstStyle>
+            <a:p>
+              <a:pPr algn="ctr"/>
+              <a:endParaRPr lang="zh-TW" altLang="en-US" sz="3200" b="1" dirty="0">
+                <a:solidFill>
+                  <a:schemeClr val="bg1"/>
+                </a:solidFill>
+                <a:latin typeface="俐方體11號" pitchFamily="2" charset="-120"/>
+                <a:ea typeface="俐方體11號" pitchFamily="2" charset="-120"/>
+              </a:endParaRPr>
+            </a:p>
+          </p:txBody>
+        </p:sp>
+      </p:grpSp>
+      <p:sp>
+        <p:nvSpPr>
+          <p:cNvPr id="30" name="矩形 29">
+            <a:extLst>
+              <a:ext uri="{FF2B5EF4-FFF2-40B4-BE49-F238E27FC236}">
+                <a16:creationId xmlns:a16="http://schemas.microsoft.com/office/drawing/2014/main" id="{1E02C2F4-0EE0-4985-9F05-461B41BB1992}"/>
+              </a:ext>
+            </a:extLst>
+          </p:cNvPr>
+          <p:cNvSpPr/>
+          <p:nvPr/>
+        </p:nvSpPr>
+        <p:spPr>
+          <a:xfrm>
+            <a:off x="16554734" y="1343105"/>
+            <a:ext cx="419280" cy="6818256"/>
+          </a:xfrm>
+          <a:prstGeom prst="rect">
+            <a:avLst/>
+          </a:prstGeom>
+          <a:noFill/>
+          <a:ln w="57150">
+            <a:solidFill>
+              <a:schemeClr val="tx1"/>
+            </a:solidFill>
+          </a:ln>
+        </p:spPr>
+        <p:style>
+          <a:lnRef idx="2">
+            <a:schemeClr val="accent1">
+              <a:shade val="50000"/>
+            </a:schemeClr>
+          </a:lnRef>
+          <a:fillRef idx="1">
+            <a:schemeClr val="accent1"/>
+          </a:fillRef>
+          <a:effectRef idx="0">
+            <a:schemeClr val="accent1"/>
+          </a:effectRef>
+          <a:fontRef idx="minor">
+            <a:schemeClr val="lt1"/>
+          </a:fontRef>
+        </p:style>
+        <p:txBody>
+          <a:bodyPr rtlCol="0" anchor="ctr"/>
+          <a:lstStyle/>
+          <a:p>
+            <a:pPr algn="ctr"/>
+            <a:endParaRPr lang="zh-TW" altLang="en-US" sz="5400" b="1"/>
+          </a:p>
+        </p:txBody>
+      </p:sp>
+      <p:sp>
+        <p:nvSpPr>
+          <p:cNvPr id="31" name="矩形 30">
+            <a:extLst>
+              <a:ext uri="{FF2B5EF4-FFF2-40B4-BE49-F238E27FC236}">
+                <a16:creationId xmlns:a16="http://schemas.microsoft.com/office/drawing/2014/main" id="{8872FF75-7DED-4C10-A216-62FD50CE8141}"/>
+              </a:ext>
+            </a:extLst>
+          </p:cNvPr>
+          <p:cNvSpPr/>
+          <p:nvPr/>
+        </p:nvSpPr>
+        <p:spPr>
+          <a:xfrm>
+            <a:off x="11678036" y="1343105"/>
+            <a:ext cx="419280" cy="6818256"/>
+          </a:xfrm>
+          <a:prstGeom prst="rect">
+            <a:avLst/>
+          </a:prstGeom>
+          <a:noFill/>
+          <a:ln w="57150">
+            <a:solidFill>
+              <a:schemeClr val="tx1"/>
+            </a:solidFill>
+          </a:ln>
+        </p:spPr>
+        <p:style>
+          <a:lnRef idx="2">
+            <a:schemeClr val="accent1">
+              <a:shade val="50000"/>
+            </a:schemeClr>
+          </a:lnRef>
+          <a:fillRef idx="1">
+            <a:schemeClr val="accent1"/>
+          </a:fillRef>
+          <a:effectRef idx="0">
+            <a:schemeClr val="accent1"/>
+          </a:effectRef>
+          <a:fontRef idx="minor">
+            <a:schemeClr val="lt1"/>
+          </a:fontRef>
+        </p:style>
+        <p:txBody>
+          <a:bodyPr rtlCol="0" anchor="ctr"/>
+          <a:lstStyle/>
+          <a:p>
+            <a:pPr algn="ctr"/>
+            <a:endParaRPr lang="zh-TW" altLang="en-US" sz="5400" b="1"/>
+          </a:p>
+        </p:txBody>
+      </p:sp>
+    </p:spTree>
+    <p:extLst>
+      <p:ext uri="{BB962C8B-B14F-4D97-AF65-F5344CB8AC3E}">
+        <p14:creationId xmlns:p14="http://schemas.microsoft.com/office/powerpoint/2010/main" val="2836940706"/>
+      </p:ext>
+    </p:extLst>
+  </p:cSld>
+  <p:clrMapOvr>
+    <a:masterClrMapping/>
+  </p:clrMapOvr>
+  <mc:AlternateContent xmlns:mc="http://schemas.openxmlformats.org/markup-compatibility/2006" xmlns:p14="http://schemas.microsoft.com/office/powerpoint/2010/main">
+    <mc:Choice Requires="p14">
+      <p:transition spd="slow" p14:dur="2000">
+        <p:cut/>
+      </p:transition>
+    </mc:Choice>
+    <mc:Fallback xmlns="">
+      <p:transition spd="slow">
+        <p:cut/>
+      </p:transition>
+    </mc:Fallback>
+  </mc:AlternateContent>
+</p:sld>
+</file>
+
+<file path=ppt/slides/slide3.xml><?xml version="1.0" encoding="utf-8"?>
+<p:sld xmlns:a="http://schemas.openxmlformats.org/drawingml/2006/main" xmlns:r="http://schemas.openxmlformats.org/officeDocument/2006/relationships" xmlns:p="http://schemas.openxmlformats.org/presentationml/2006/main">
+  <p:cSld>
+    <p:spTree>
+      <p:nvGrpSpPr>
+        <p:cNvPr id="1" name=""/>
+        <p:cNvGrpSpPr/>
+        <p:nvPr/>
+      </p:nvGrpSpPr>
+      <p:grpSpPr>
+        <a:xfrm>
+          <a:off x="0" y="0"/>
+          <a:ext cx="0" cy="0"/>
+          <a:chOff x="0" y="0"/>
+          <a:chExt cx="0" cy="0"/>
+        </a:xfrm>
+      </p:grpSpPr>
+      <p:pic>
+        <p:nvPicPr>
+          <p:cNvPr id="36" name="圖片 35">
+            <a:extLst>
+              <a:ext uri="{FF2B5EF4-FFF2-40B4-BE49-F238E27FC236}">
+                <a16:creationId xmlns:a16="http://schemas.microsoft.com/office/drawing/2014/main" id="{24EBB6BF-0AA1-4349-85C6-779F5BF6BDE0}"/>
+              </a:ext>
+            </a:extLst>
+          </p:cNvPr>
+          <p:cNvPicPr>
+            <a:picLocks noChangeAspect="1"/>
+          </p:cNvPicPr>
+          <p:nvPr/>
+        </p:nvPicPr>
+        <p:blipFill rotWithShape="1">
+          <a:blip r:embed="rId3">
+            <a:extLst>
+              <a:ext uri="{28A0092B-C50C-407E-A947-70E740481C1C}">
+                <a14:useLocalDpi xmlns:a14="http://schemas.microsoft.com/office/drawing/2010/main" val="0"/>
+              </a:ext>
+            </a:extLst>
+          </a:blip>
+          <a:srcRect r="59052"/>
+          <a:stretch/>
+        </p:blipFill>
+        <p:spPr>
+          <a:xfrm>
+            <a:off x="1357870" y="2135740"/>
+            <a:ext cx="853068" cy="7463829"/>
+          </a:xfrm>
+          <a:prstGeom prst="rect">
+            <a:avLst/>
+          </a:prstGeom>
+        </p:spPr>
+      </p:pic>
+      <p:sp>
+        <p:nvSpPr>
+          <p:cNvPr id="37" name="矩形 36">
+            <a:extLst>
+              <a:ext uri="{FF2B5EF4-FFF2-40B4-BE49-F238E27FC236}">
+                <a16:creationId xmlns:a16="http://schemas.microsoft.com/office/drawing/2014/main" id="{5564F3D3-EFBE-4F42-8BE4-46CB27F099A7}"/>
+              </a:ext>
+            </a:extLst>
+          </p:cNvPr>
+          <p:cNvSpPr/>
+          <p:nvPr/>
+        </p:nvSpPr>
+        <p:spPr>
+          <a:xfrm>
+            <a:off x="0" y="0"/>
+            <a:ext cx="18288000" cy="10287000"/>
+          </a:xfrm>
+          <a:prstGeom prst="rect">
+            <a:avLst/>
+          </a:prstGeom>
+          <a:noFill/>
+          <a:ln w="38100">
+            <a:noFill/>
+          </a:ln>
+        </p:spPr>
+        <p:style>
+          <a:lnRef idx="2">
+            <a:schemeClr val="accent1">
+              <a:shade val="50000"/>
+            </a:schemeClr>
+          </a:lnRef>
+          <a:fillRef idx="1">
+            <a:schemeClr val="accent1"/>
+          </a:fillRef>
+          <a:effectRef idx="0">
+            <a:schemeClr val="accent1"/>
+          </a:effectRef>
+          <a:fontRef idx="minor">
+            <a:schemeClr val="lt1"/>
+          </a:fontRef>
+        </p:style>
+        <p:txBody>
+          <a:bodyPr rtlCol="0" anchor="ctr"/>
+          <a:lstStyle/>
+          <a:p>
+            <a:pPr algn="ctr"/>
+            <a:endParaRPr lang="zh-TW" altLang="en-US" sz="5400">
+              <a:solidFill>
+                <a:schemeClr val="bg1"/>
+              </a:solidFill>
+            </a:endParaRPr>
+          </a:p>
+        </p:txBody>
+      </p:sp>
+    </p:spTree>
+    <p:extLst>
+      <p:ext uri="{BB962C8B-B14F-4D97-AF65-F5344CB8AC3E}">
+        <p14:creationId xmlns:p14="http://schemas.microsoft.com/office/powerpoint/2010/main" val="946561758"/>
+      </p:ext>
+    </p:extLst>
+  </p:cSld>
+  <p:clrMapOvr>
+    <a:masterClrMapping/>
+  </p:clrMapOvr>
+  <mc:AlternateContent xmlns:mc="http://schemas.openxmlformats.org/markup-compatibility/2006" xmlns:p14="http://schemas.microsoft.com/office/powerpoint/2010/main">
+    <mc:Choice Requires="p14">
+      <p:transition spd="slow" p14:dur="2000">
+        <p:cut/>
+      </p:transition>
+    </mc:Choice>
+    <mc:Fallback xmlns="">
+      <p:transition spd="slow">
+        <p:cut/>
+      </p:transition>
+    </mc:Fallback>
+  </mc:AlternateContent>
+</p:sld>
+</file>
+
+<file path=ppt/slides/slide30.xml><?xml version="1.0" encoding="utf-8"?>
+<p:sld xmlns:a="http://schemas.openxmlformats.org/drawingml/2006/main" xmlns:r="http://schemas.openxmlformats.org/officeDocument/2006/relationships" xmlns:p="http://schemas.openxmlformats.org/presentationml/2006/main">
+  <p:cSld>
+    <p:spTree>
+      <p:nvGrpSpPr>
+        <p:cNvPr id="1" name=""/>
+        <p:cNvGrpSpPr/>
+        <p:nvPr/>
+      </p:nvGrpSpPr>
+      <p:grpSpPr>
+        <a:xfrm>
+          <a:off x="0" y="0"/>
+          <a:ext cx="0" cy="0"/>
+          <a:chOff x="0" y="0"/>
+          <a:chExt cx="0" cy="0"/>
+        </a:xfrm>
+      </p:grpSpPr>
+      <p:sp>
+        <p:nvSpPr>
           <p:cNvPr id="2" name="標題 1">
             <a:extLst>
               <a:ext uri="{FF2B5EF4-FFF2-40B4-BE49-F238E27FC236}">
@@ -34272,7 +36832,7 @@
 </p:sld>
 </file>
 
-<file path=ppt/slides/slide29.xml><?xml version="1.0" encoding="utf-8"?>
+<file path=ppt/slides/slide31.xml><?xml version="1.0" encoding="utf-8"?>
 <p:sld xmlns:a="http://schemas.openxmlformats.org/drawingml/2006/main" xmlns:r="http://schemas.openxmlformats.org/officeDocument/2006/relationships" xmlns:p="http://schemas.openxmlformats.org/presentationml/2006/main">
   <p:cSld>
     <p:spTree>
@@ -34393,137 +36953,6 @@
     <p:extLst>
       <p:ext uri="{BB962C8B-B14F-4D97-AF65-F5344CB8AC3E}">
         <p14:creationId xmlns:p14="http://schemas.microsoft.com/office/powerpoint/2010/main" val="238326590"/>
-      </p:ext>
-    </p:extLst>
-  </p:cSld>
-  <p:clrMapOvr>
-    <a:masterClrMapping/>
-  </p:clrMapOvr>
-  <mc:AlternateContent xmlns:mc="http://schemas.openxmlformats.org/markup-compatibility/2006" xmlns:p14="http://schemas.microsoft.com/office/powerpoint/2010/main">
-    <mc:Choice Requires="p14">
-      <p:transition spd="slow" p14:dur="2000">
-        <p:cut/>
-      </p:transition>
-    </mc:Choice>
-    <mc:Fallback xmlns="">
-      <p:transition spd="slow">
-        <p:cut/>
-      </p:transition>
-    </mc:Fallback>
-  </mc:AlternateContent>
-</p:sld>
-</file>
-
-<file path=ppt/slides/slide3.xml><?xml version="1.0" encoding="utf-8"?>
-<p:sld xmlns:a="http://schemas.openxmlformats.org/drawingml/2006/main" xmlns:r="http://schemas.openxmlformats.org/officeDocument/2006/relationships" xmlns:p="http://schemas.openxmlformats.org/presentationml/2006/main">
-  <p:cSld>
-    <p:spTree>
-      <p:nvGrpSpPr>
-        <p:cNvPr id="1" name=""/>
-        <p:cNvGrpSpPr/>
-        <p:nvPr/>
-      </p:nvGrpSpPr>
-      <p:grpSpPr>
-        <a:xfrm>
-          <a:off x="0" y="0"/>
-          <a:ext cx="0" cy="0"/>
-          <a:chOff x="0" y="0"/>
-          <a:chExt cx="0" cy="0"/>
-        </a:xfrm>
-      </p:grpSpPr>
-      <p:pic>
-        <p:nvPicPr>
-          <p:cNvPr id="36" name="圖片 35">
-            <a:extLst>
-              <a:ext uri="{FF2B5EF4-FFF2-40B4-BE49-F238E27FC236}">
-                <a16:creationId xmlns:a16="http://schemas.microsoft.com/office/drawing/2014/main" id="{24EBB6BF-0AA1-4349-85C6-779F5BF6BDE0}"/>
-              </a:ext>
-            </a:extLst>
-          </p:cNvPr>
-          <p:cNvPicPr>
-            <a:picLocks noChangeAspect="1"/>
-          </p:cNvPicPr>
-          <p:nvPr/>
-        </p:nvPicPr>
-        <p:blipFill rotWithShape="1">
-          <a:blip r:embed="rId3">
-            <a:extLst>
-              <a:ext uri="{28A0092B-C50C-407E-A947-70E740481C1C}">
-                <a14:useLocalDpi xmlns:a14="http://schemas.microsoft.com/office/drawing/2010/main" val="0"/>
-              </a:ext>
-            </a:extLst>
-          </a:blip>
-          <a:srcRect r="59052"/>
-          <a:stretch/>
-        </p:blipFill>
-        <p:spPr>
-          <a:xfrm>
-            <a:off x="1357870" y="2135740"/>
-            <a:ext cx="853068" cy="7463829"/>
-          </a:xfrm>
-          <a:prstGeom prst="rect">
-            <a:avLst/>
-          </a:prstGeom>
-        </p:spPr>
-      </p:pic>
-      <p:sp>
-        <p:nvSpPr>
-          <p:cNvPr id="37" name="矩形 36">
-            <a:extLst>
-              <a:ext uri="{FF2B5EF4-FFF2-40B4-BE49-F238E27FC236}">
-                <a16:creationId xmlns:a16="http://schemas.microsoft.com/office/drawing/2014/main" id="{5564F3D3-EFBE-4F42-8BE4-46CB27F099A7}"/>
-              </a:ext>
-            </a:extLst>
-          </p:cNvPr>
-          <p:cNvSpPr/>
-          <p:nvPr/>
-        </p:nvSpPr>
-        <p:spPr>
-          <a:xfrm>
-            <a:off x="0" y="0"/>
-            <a:ext cx="18288000" cy="10287000"/>
-          </a:xfrm>
-          <a:prstGeom prst="rect">
-            <a:avLst/>
-          </a:prstGeom>
-          <a:noFill/>
-          <a:ln w="38100">
-            <a:noFill/>
-          </a:ln>
-        </p:spPr>
-        <p:style>
-          <a:lnRef idx="2">
-            <a:schemeClr val="accent1">
-              <a:shade val="50000"/>
-            </a:schemeClr>
-          </a:lnRef>
-          <a:fillRef idx="1">
-            <a:schemeClr val="accent1"/>
-          </a:fillRef>
-          <a:effectRef idx="0">
-            <a:schemeClr val="accent1"/>
-          </a:effectRef>
-          <a:fontRef idx="minor">
-            <a:schemeClr val="lt1"/>
-          </a:fontRef>
-        </p:style>
-        <p:txBody>
-          <a:bodyPr rtlCol="0" anchor="ctr"/>
-          <a:lstStyle/>
-          <a:p>
-            <a:pPr algn="ctr"/>
-            <a:endParaRPr lang="zh-TW" altLang="en-US" sz="5400">
-              <a:solidFill>
-                <a:schemeClr val="bg1"/>
-              </a:solidFill>
-            </a:endParaRPr>
-          </a:p>
-        </p:txBody>
-      </p:sp>
-    </p:spTree>
-    <p:extLst>
-      <p:ext uri="{BB962C8B-B14F-4D97-AF65-F5344CB8AC3E}">
-        <p14:creationId xmlns:p14="http://schemas.microsoft.com/office/powerpoint/2010/main" val="946561758"/>
       </p:ext>
     </p:extLst>
   </p:cSld>

--- a/UI_PX.pptx
+++ b/UI_PX.pptx
@@ -282,7 +282,7 @@
           <a:p>
             <a:fld id="{05484709-82B2-4E7F-9F86-2B0FA413AB70}" type="datetimeFigureOut">
               <a:rPr lang="zh-TW" altLang="en-US" smtClean="0"/>
-              <a:t>2026/5/26</a:t>
+              <a:t>2026/5/29</a:t>
             </a:fld>
             <a:endParaRPr lang="zh-TW" altLang="en-US"/>
           </a:p>
@@ -764,7 +764,7 @@
           <a:p>
             <a:fld id="{7E94FD5F-AE28-41FF-BA8E-7FE1DE9168D7}" type="datetimeFigureOut">
               <a:rPr lang="zh-TW" altLang="en-US" smtClean="0"/>
-              <a:t>2026/5/26</a:t>
+              <a:t>2026/5/29</a:t>
             </a:fld>
             <a:endParaRPr lang="zh-TW" altLang="en-US"/>
           </a:p>
@@ -934,7 +934,7 @@
           <a:p>
             <a:fld id="{7E94FD5F-AE28-41FF-BA8E-7FE1DE9168D7}" type="datetimeFigureOut">
               <a:rPr lang="zh-TW" altLang="en-US" smtClean="0"/>
-              <a:t>2026/5/26</a:t>
+              <a:t>2026/5/29</a:t>
             </a:fld>
             <a:endParaRPr lang="zh-TW" altLang="en-US"/>
           </a:p>
@@ -1114,7 +1114,7 @@
           <a:p>
             <a:fld id="{7E94FD5F-AE28-41FF-BA8E-7FE1DE9168D7}" type="datetimeFigureOut">
               <a:rPr lang="zh-TW" altLang="en-US" smtClean="0"/>
-              <a:t>2026/5/26</a:t>
+              <a:t>2026/5/29</a:t>
             </a:fld>
             <a:endParaRPr lang="zh-TW" altLang="en-US"/>
           </a:p>
@@ -1284,7 +1284,7 @@
           <a:p>
             <a:fld id="{7E94FD5F-AE28-41FF-BA8E-7FE1DE9168D7}" type="datetimeFigureOut">
               <a:rPr lang="zh-TW" altLang="en-US" smtClean="0"/>
-              <a:t>2026/5/26</a:t>
+              <a:t>2026/5/29</a:t>
             </a:fld>
             <a:endParaRPr lang="zh-TW" altLang="en-US"/>
           </a:p>
@@ -1530,7 +1530,7 @@
           <a:p>
             <a:fld id="{7E94FD5F-AE28-41FF-BA8E-7FE1DE9168D7}" type="datetimeFigureOut">
               <a:rPr lang="zh-TW" altLang="en-US" smtClean="0"/>
-              <a:t>2026/5/26</a:t>
+              <a:t>2026/5/29</a:t>
             </a:fld>
             <a:endParaRPr lang="zh-TW" altLang="en-US"/>
           </a:p>
@@ -1762,7 +1762,7 @@
           <a:p>
             <a:fld id="{7E94FD5F-AE28-41FF-BA8E-7FE1DE9168D7}" type="datetimeFigureOut">
               <a:rPr lang="zh-TW" altLang="en-US" smtClean="0"/>
-              <a:t>2026/5/26</a:t>
+              <a:t>2026/5/29</a:t>
             </a:fld>
             <a:endParaRPr lang="zh-TW" altLang="en-US"/>
           </a:p>
@@ -2129,7 +2129,7 @@
           <a:p>
             <a:fld id="{7E94FD5F-AE28-41FF-BA8E-7FE1DE9168D7}" type="datetimeFigureOut">
               <a:rPr lang="zh-TW" altLang="en-US" smtClean="0"/>
-              <a:t>2026/5/26</a:t>
+              <a:t>2026/5/29</a:t>
             </a:fld>
             <a:endParaRPr lang="zh-TW" altLang="en-US"/>
           </a:p>
@@ -2247,7 +2247,7 @@
           <a:p>
             <a:fld id="{7E94FD5F-AE28-41FF-BA8E-7FE1DE9168D7}" type="datetimeFigureOut">
               <a:rPr lang="zh-TW" altLang="en-US" smtClean="0"/>
-              <a:t>2026/5/26</a:t>
+              <a:t>2026/5/29</a:t>
             </a:fld>
             <a:endParaRPr lang="zh-TW" altLang="en-US"/>
           </a:p>
@@ -2342,7 +2342,7 @@
           <a:p>
             <a:fld id="{7E94FD5F-AE28-41FF-BA8E-7FE1DE9168D7}" type="datetimeFigureOut">
               <a:rPr lang="zh-TW" altLang="en-US" smtClean="0"/>
-              <a:t>2026/5/26</a:t>
+              <a:t>2026/5/29</a:t>
             </a:fld>
             <a:endParaRPr lang="zh-TW" altLang="en-US"/>
           </a:p>
@@ -2619,7 +2619,7 @@
           <a:p>
             <a:fld id="{7E94FD5F-AE28-41FF-BA8E-7FE1DE9168D7}" type="datetimeFigureOut">
               <a:rPr lang="zh-TW" altLang="en-US" smtClean="0"/>
-              <a:t>2026/5/26</a:t>
+              <a:t>2026/5/29</a:t>
             </a:fld>
             <a:endParaRPr lang="zh-TW" altLang="en-US"/>
           </a:p>
@@ -2876,7 +2876,7 @@
           <a:p>
             <a:fld id="{7E94FD5F-AE28-41FF-BA8E-7FE1DE9168D7}" type="datetimeFigureOut">
               <a:rPr lang="zh-TW" altLang="en-US" smtClean="0"/>
-              <a:t>2026/5/26</a:t>
+              <a:t>2026/5/29</a:t>
             </a:fld>
             <a:endParaRPr lang="zh-TW" altLang="en-US"/>
           </a:p>
@@ -3089,7 +3089,7 @@
           <a:p>
             <a:fld id="{7E94FD5F-AE28-41FF-BA8E-7FE1DE9168D7}" type="datetimeFigureOut">
               <a:rPr lang="zh-TW" altLang="en-US" smtClean="0"/>
-              <a:t>2026/5/26</a:t>
+              <a:t>2026/5/29</a:t>
             </a:fld>
             <a:endParaRPr lang="zh-TW" altLang="en-US"/>
           </a:p>
@@ -36430,110 +36430,6 @@
           </p:txBody>
         </p:sp>
       </p:grpSp>
-      <p:sp>
-        <p:nvSpPr>
-          <p:cNvPr id="30" name="矩形 29">
-            <a:extLst>
-              <a:ext uri="{FF2B5EF4-FFF2-40B4-BE49-F238E27FC236}">
-                <a16:creationId xmlns:a16="http://schemas.microsoft.com/office/drawing/2014/main" id="{1E02C2F4-0EE0-4985-9F05-461B41BB1992}"/>
-              </a:ext>
-            </a:extLst>
-          </p:cNvPr>
-          <p:cNvSpPr/>
-          <p:nvPr/>
-        </p:nvSpPr>
-        <p:spPr>
-          <a:xfrm>
-            <a:off x="16554734" y="1343105"/>
-            <a:ext cx="419280" cy="6818256"/>
-          </a:xfrm>
-          <a:prstGeom prst="rect">
-            <a:avLst/>
-          </a:prstGeom>
-          <a:noFill/>
-          <a:ln w="57150">
-            <a:solidFill>
-              <a:schemeClr val="tx1"/>
-            </a:solidFill>
-          </a:ln>
-        </p:spPr>
-        <p:style>
-          <a:lnRef idx="2">
-            <a:schemeClr val="accent1">
-              <a:shade val="50000"/>
-            </a:schemeClr>
-          </a:lnRef>
-          <a:fillRef idx="1">
-            <a:schemeClr val="accent1"/>
-          </a:fillRef>
-          <a:effectRef idx="0">
-            <a:schemeClr val="accent1"/>
-          </a:effectRef>
-          <a:fontRef idx="minor">
-            <a:schemeClr val="lt1"/>
-          </a:fontRef>
-        </p:style>
-        <p:txBody>
-          <a:bodyPr rtlCol="0" anchor="ctr"/>
-          <a:lstStyle/>
-          <a:p>
-            <a:pPr algn="ctr"/>
-            <a:endParaRPr lang="zh-TW" altLang="en-US" sz="5400" b="1"/>
-          </a:p>
-        </p:txBody>
-      </p:sp>
-      <p:sp>
-        <p:nvSpPr>
-          <p:cNvPr id="31" name="矩形 30">
-            <a:extLst>
-              <a:ext uri="{FF2B5EF4-FFF2-40B4-BE49-F238E27FC236}">
-                <a16:creationId xmlns:a16="http://schemas.microsoft.com/office/drawing/2014/main" id="{8872FF75-7DED-4C10-A216-62FD50CE8141}"/>
-              </a:ext>
-            </a:extLst>
-          </p:cNvPr>
-          <p:cNvSpPr/>
-          <p:nvPr/>
-        </p:nvSpPr>
-        <p:spPr>
-          <a:xfrm>
-            <a:off x="11678036" y="1343105"/>
-            <a:ext cx="419280" cy="6818256"/>
-          </a:xfrm>
-          <a:prstGeom prst="rect">
-            <a:avLst/>
-          </a:prstGeom>
-          <a:noFill/>
-          <a:ln w="57150">
-            <a:solidFill>
-              <a:schemeClr val="tx1"/>
-            </a:solidFill>
-          </a:ln>
-        </p:spPr>
-        <p:style>
-          <a:lnRef idx="2">
-            <a:schemeClr val="accent1">
-              <a:shade val="50000"/>
-            </a:schemeClr>
-          </a:lnRef>
-          <a:fillRef idx="1">
-            <a:schemeClr val="accent1"/>
-          </a:fillRef>
-          <a:effectRef idx="0">
-            <a:schemeClr val="accent1"/>
-          </a:effectRef>
-          <a:fontRef idx="minor">
-            <a:schemeClr val="lt1"/>
-          </a:fontRef>
-        </p:style>
-        <p:txBody>
-          <a:bodyPr rtlCol="0" anchor="ctr"/>
-          <a:lstStyle/>
-          <a:p>
-            <a:pPr algn="ctr"/>
-            <a:endParaRPr lang="zh-TW" altLang="en-US" sz="5400" b="1"/>
-          </a:p>
-        </p:txBody>
-      </p:sp>
     </p:spTree>
     <p:extLst>
       <p:ext uri="{BB962C8B-B14F-4D97-AF65-F5344CB8AC3E}">
